--- a/kvcache/unified_kv_memory/统一异构KVCache存储池_第一方推理基础设施立项汇报_10页精美图表增强版_20260814.pptx
+++ b/kvcache/unified_kv_memory/统一异构KVCache存储池_第一方推理基础设施立项汇报_10页精美图表增强版_20260814.pptx
@@ -513,7 +513,7 @@
           <a:lstStyle/>
           <a:p>
             <a:r>
-              <a:t>尊敬的各位领导、评审专家：大家好！今天由我代表统一内存与存储系统架构团队，就《统一异构 KVCache 存储池总体架构与关键技术》向各位做立项汇报。本项目聚焦在大模型在线推理场景下，通过软硬件深度协同打造面向国产 AI 硬件的统一异构状态管理与传输调度底座，实现首字延迟降低 ≥20%、显存有效容量提升 ≥30%、错误消费率为 0。下面由我向大家详细汇报为什么要做、产业格局、方案设计、量化收益与原型验证规划。</a:t>
+              <a:t>尊敬的各位领导、评审专家：大家好！今天由我代表团队就《统一异构 KVCache 存储池总体架构与关键技术》向各位做立项汇报。针对初评专家组的意见，我们将系统定位正式明确为：基于 Mooncake 开源底座进行面向国产 AI 硬件的原厂软硬件协同深度重构的高性能推理底座。复用开源生态外壳，深度重构传输与调度内核，实现首字延迟降低 ≥20%、显存有效容量提升 ≥30%、错误消费率为 0。下面由我向大家详细汇报为什么要做、开源局限与增强方案、量化收益与验证规划。</a:t>
             </a:r>
           </a:p>
         </p:txBody>
@@ -583,7 +583,7 @@
           <a:lstStyle/>
           <a:p>
             <a:r>
-              <a:t>在在线推理场景中，P50 中位数无法代表真实体验，真正的技术挑战在于高并发混压下的 P99 尾延迟控制。本项目确立了清晰的达成手段：通过 URMA 硬件 QoS 队列保障 P99 TTFT 改善 ≥20%、通过双 Stream 流水保障 TPOT 抖动 &lt;3%、通过 CPU 零数据拷贝与 Direct DMA 降低单次有效请求成本 ≥35%、通过严格语义校验与租约机制实现 0 错误消费。同时弱化纯纸面数字估算，从算力利用、硬件投入与按时达标率三大维度阐明降低业务 ROI 的底层逻辑，用严密的技术手段支撑立项。</a:t>
+              <a:t>在在线推理场景中，P50 中位数无法代表真实体验，真正的技术挑战在于高并发混压下的 P99 尾延迟控制。本项目确立了清晰的达成手段：通过 URMA 硬件 QoS 队列保障 P99 TTFT 改善 ≥20%、通过双 Stream 流水保障 TPOT 抖动 &lt;3%、通过 Host CPU 零数据拷贝与 Direct DMA 降低单次有效请求成本 ≥35%、通过严格 6 维语义校验与租约机制实现 0 错误消费。用严密的技术手段支撑立项。</a:t>
             </a:r>
           </a:p>
         </p:txBody>
@@ -723,7 +723,7 @@
           <a:lstStyle/>
           <a:p>
             <a:r>
-              <a:t>以上是《统一异构 KVCache 存储池总体架构与关键技术》立项汇报的全部内容。我们始终坚持务实落地、数据驱动的工程师准则，通过 4~5 周敏捷原型验证摸清技术边界，按 E0~E3 门禁安全可控推进研发投入。非常感谢各位领导和评审专家的耐心聆听，诚挚期待各位专家的批评、指导与提问！</a:t>
+              <a:t>以上是《统一异构 KVCache 存储池总体架构与关键技术》立项汇报的全部内容。我们始终坚持务实落地、数据驱动的工程师准则，基于 Mooncake 深度重构与架构增强，通过 4~5 周敏捷原型验证摸清技术边界，按四个核心验证阶段 (E0~E3) 门禁安全可控推进研发投入。非常感谢各位领导和评审专家的耐心聆听，诚挚期待各位专家的批评、指导与提问！</a:t>
             </a:r>
           </a:p>
         </p:txBody>
@@ -793,7 +793,7 @@
           <a:lstStyle/>
           <a:p>
             <a:r>
-              <a:t>各位评委专家：我们今天启动的是面向国产 AI 硬件的统一异构 KVCache 存储与传输调度底座工程。在大模型在线推理场景下，KVCache 已从框架内临时缓存升维为跨节点、跨介质流动的高价值执行状态。其生命周期管理直接决定首字生成延迟 TTFT、逐词生成抖动 TPOT 以及集群全生命周期 TCO。在国产硬件上，芯片、固件、驱动与推理框架之间的深度协同无法依赖通用开源社区。只有立足原厂软硬件协同自研，才能把 UBMEM 统一总线内存直通与 URMA 等底层通信原语转化为稳定的业务服务质量，实现首字延迟降低 ≥20%、HBM 有效容量提升 ≥30%、消费错误率归零。</a:t>
+              <a:t>各位评委专家：我们今天启动的是基于 Mooncake 深度重构与架构增强的面向国产 AI 硬件统一异构 KVCache 存储与调度底座工程。在大模型在线推理场景下，KVCache 已从单机临时缓存升维为集群高价值执行状态。借 Mooncake 的开源成熟底盘承接生态连接，借我们原厂的硬件原语、微架构通路与语义智能进行内核替换与能力重构，既消除了重新造轮子的立项阻力，又确保各项硬核需求在国产硬件上 100% 落地。</a:t>
             </a:r>
           </a:p>
         </p:txBody>
@@ -863,7 +863,7 @@
           <a:lstStyle/>
           <a:p>
             <a:r>
-              <a:t>纵观全球芯片巨头动作，NVIDIA 通过 TensorRT-LLM、KVBM 与 NIM 打造闭环推理基础设施；AMD 收购 Nod.ai、Silo AI 与 ZT Systems，力推 NIXL 传输引擎与 LMCache；Intel 借力 OpenVINO 与 Xeon DDR5 / CXL 做溢出层；Arm 推出 KleidiAI 与 CXL 3.0 机架池。产业共性规律表明：Prefill-Decode 分离与 Host-Bypass 硬件卸载已成为行业事实标准。硬件厂商的竞争已从单芯片算力演进为推理软件与状态管理全栈闭环。国产硬件若缺乏软硬件协同底座，芯片硬件潜力将无法转化为可感知的端到端收益。</a:t>
+              <a:t>纵观全球芯片巨头动作，NVIDIA 通过 TensorRT-LLM、KVBM 与 NIM 打造闭环推理基础设施；AMD 布局 NIXL 与 LMCache；Intel 借力 OpenVINO 与 Xeon DDR5 / CXL 做溢出层；Arm 推出 KleidiAI 与 CXL 3.0 机架池。产业共性规律表明：开源提供通用抽象，芯片硬件厂商必须通过原厂深度软硬件协同才能释放极致算力。我们基于 Mooncake 深度重构与架构增强，正是契合了业界这一主流演进路径。</a:t>
             </a:r>
           </a:p>
         </p:txBody>
@@ -933,7 +933,7 @@
           <a:lstStyle/>
           <a:p>
             <a:r>
-              <a:t>评估现代 AI Infra 时，本项目与 Mooncake 代表了两种不同的设计哲学。Mooncake 本质上是通用的 64 KB 切片传输组件，通过多网卡打满写带宽；但这在前台读/拉取阶段引发了挑战——多节点并发回传容易触发交换机 Incast 拥塞与 P99 尾延迟抖动。而 Mooncake 公开 Benchmark 多采用 1-to-1 单流及 P50 中位数，避开了真实高并发下的长尾挑战。本项目 unified_kv_memory 建立 LLM 语义化异构内存池，以模型 Layer 语义优化物理拓扑，消除 Incast 拥塞。我们与 Mooncake / LMCache 保持接口兼容、能力互补，但在国产硬件深度适配与 SLA 兜底上独立闭环。</a:t>
+              <a:t>Mooncake (FAST '25) 是优秀的通用传输组件，采用 64KB 切片多网卡并发发送 (Slice Spraying)，在后台写/卸载时跑出了惊艳的 87GB/s+ 吞吐。但其关键局限在于前台读/拉取阶段：由于将 KV 视为无语义二进制字节流并切碎打散，导致 Layer 0 切片易遇慢网卡卡死 NPU 计算流水，且多节点并发回传引发交换机 Incast 拥塞与 PFC 死锁。这正是我们必须对 Mooncake 进行传输内核重构的第一大技术抓手！</a:t>
             </a:r>
           </a:p>
         </p:txBody>
@@ -1003,7 +1003,7 @@
           <a:lstStyle/>
           <a:p>
             <a:r>
-              <a:t>请专家重点关注本页的代码分析与社区真实反馈证据。我们在 Mooncake 源码中找到了明确的工程事实：第一，在 types.h 传输结构体中，没有 layer_id 字段，导致 Layer 0 切片遇慢网卡时 NPU 计算流水阻塞；第二，在 admission_queue.cpp RFC #2519 中，官方在出队末端增加超时丢弃，以及在 multi_rail_scheduler 中增加软件令牌桶控速，表明其切片模式在高并发下可能导致网络拥塞与队列积压；第三，在 vLLM 社区 PR #10502 和 #10884 中，多家厂商反馈在 100+ 节点混压下 P99 尾延迟出现波动；第四，在 mooncake-store 源码中，大规模 HA 高可用和多租户配额仅保留了 Stub 空桩，难以直接用于生产。我们必须坚持软硬件协同自研底座！</a:t>
+              <a:t>请专家重点关注本页的代码分析与社区证据：第一，Mooncake 源码 types.h 中完全没有 layer_id，无法感知模型计算时序；第二，缺乏 UBMEM 与 URMA 原生驱动支持，未打通 HBM-SSD 直达通路；第三，缺乏微秒级动态 ROI 决策，短前缀盲目拉取导致 TTFT 反噬；第四，缺乏包含模型、词表、模板与租约的 6 维语义校验，存在脏数据错误消费风险；第五，缺乏 TP=8 多卡协同机制，容易引发集合通信死锁。这 5 大缺陷，正是我们实施深度重构、将 38 项需求转化为 5 大增强工程包的核心依据！</a:t>
             </a:r>
           </a:p>
         </p:txBody>
@@ -1073,7 +1073,7 @@
           <a:lstStyle/>
           <a:p>
             <a:r>
-              <a:t>针对开源方案的不足，本项目建立了从通用传输组件向语义化统一异构内存池的架构升级。四大支柱包括：一、拓扑亲和映射，压减 80% 跨机架流量消除 Incast 拥塞；二、Host CPU 零数据拷贝（CPU 不参与正文搬运），消除 CPU 瓶颈；三、UBMEM 芯片总线级微秒共享内存，元数据时延压降至 5 µs 以内；四、HBM ↔ SSD 直达重塑容量主路径，TCO 显著下降。</a:t>
+              <a:t>针对 Mooncake 开源底座的不足，我们设计了 5 大关键技术增强包并在本页展现四大核心支柱：一、连续块描述符编译，Layer 0 优先传输，压缩 50% 下发开销并消除 Incast；二、Host CPU 零数据拷贝与 HBM-SSD Direct DMA，释放 100% 主机 CPU 算力；三、UBMEM 总线级共享内存，元数据时延压降至微秒级至数十微秒；四、多介质统一分层，TCO 显著下降。</a:t>
             </a:r>
           </a:p>
         </p:txBody>
@@ -1143,7 +1143,7 @@
           <a:lstStyle/>
           <a:p>
             <a:r>
-              <a:t>针对开源方案的不足，本项目构筑了三项关键能力：一、前置动态收益数学决策引擎，在查表阶段即完成成本判定，无收益主动转重算，零描述符浪费；二、AICore 与 URMA 双 Stream 物理流水重叠，隐藏 ≥60% 网络传输耗时；三、严格语义校验与租约机制，保障错误/脏数据消费事故率精确为 0。</a:t>
+              <a:t>在关键技术攻关上，我们注入了三项硬核增强：一、动态选路决策引擎，前置评估成本，无收益主动重算；二、AICore 与 URMA 双 Stream 物理流水重叠，隐藏 ≥60% 传输耗时；三、6 维语义一致性校验与多卡状态同步机制，将 TP=8 状态同步时延控制在微秒级，保障错误消费率为 0、集合通信零死锁。</a:t>
             </a:r>
           </a:p>
         </p:txBody>
@@ -1213,7 +1213,7 @@
           <a:lstStyle/>
           <a:p>
             <a:r>
-              <a:t>本项目构建了围绕 KVCache 语义的四大软硬件协同关键技术：一、语义驱动的物理拓扑映射，消除 Incast 拥塞；二、AICore 与 URMA 双 Stream 物理流水重叠，利用 FlashAttention 归一化融合隐藏 ≥60% 传输耗时；三、硬件 QoS 队列隔离与 Host CPU 零数据拷贝，守住 TPOT 抖动 &lt;3%；四、UBMEM 芯片总线级微秒共享内存，元数据控制面 P99 &lt;5 µs。</a:t>
+              <a:t>本项目构建了围绕 KVCache 语义的四大软硬件协同关键技术：一、语义驱动的物理拓扑映射，消除 Incast 拥塞；二、AICore 与 URMA 双 Stream 物理流水重叠，利用 FlashAttention 归一化融合隐藏 ≥60% 传输耗时；三、硬件 QoS 队列隔离与 Host CPU 零数据拷贝，守住 TPOT 抖动 &lt;3%；四、UBMEM 芯片总线级微秒共享内存，元数据控制面保持微秒级响应。</a:t>
             </a:r>
           </a:p>
         </p:txBody>
@@ -1283,7 +1283,7 @@
           <a:lstStyle/>
           <a:p>
             <a:r>
-              <a:t>在量化指标测算中，我们严格依据数学模型给出了完整的推导过程：TTFT = T_other + T_fixed + T_prefill * (1 - c) + T_load * c。其中正价值消费率 c = r * u，u 是四级条件漏斗乘积：u1语义与候选保持率 * u2就绪/租约/多卡/权限通过率 * u3实际路径按时成功率 * u4载入正收益判定比。为什么本项目可以比开源做得更好？我们有四大针对性技术措施：第一，u1 从 90% 升至 97%，依赖统一语义身份、全局生命周期治理与缓存感知路由；第二，u2 从 95% 升至 99%，依赖共享内存元数据微秒快路径与显式租约机制，配合多卡原子保序；第三，u3 从 95% 升至 99%，依赖硬件能力感知矩阵与芯片直达传输，配合有界平滑回退，消灭 Incast 拥塞；第四，u4 从 98% 升至 99%，依赖前置动态收益数学评估引擎与实时队列观测，杜绝盲目拉取负收益。最终综合转化率从 79.60% 跃升至 94.12%。在 50% 典型场景下，端到端 7.24 ms 收益的顺序增量计算为：Step 1 控制面开销节省 1.03 ms (14%)，Step 2 正价值转化提升贡献 3.63 ms (50%)，Step 3 低长尾传输贡献 2.59 ms (36%)。高转化与低长尾传输贡献了 86% 的主要价值，为我们的软硬件协同研发确立了清晰的技术优先级。</a:t>
+              <a:t>在量化指标测算中，我们严格依据数学模型给出推导过程：TTFT = T_other + T_fixed + T_prefill * (1 - c) + T_load * c。其中正价值消费率 c = r * u，u 是四级条件漏斗乘积：u1语义与候选保持率 * u2就绪/租约/多卡/权限通过率 * u3实际路径按时成功率 * u4载入正收益判定比。为什么本项目可以比开源做得更好？我们有四大针对性技术措施：第一，u1 从 90% 升至 97%；第二，u2 从 95% 升至 99%；第三，u3 从 95% 升至 99%；第四，u4 从 98% 升至 99%。综合转化率从 79.60% 跃升至 94.12%。在 50% 典型场景下，端到端 7.24 ms 收益顺序增量为：Step 1 控制面节省 1.03 ms (14%)，Step 2 转化提升贡献 3.63 ms (50%)，Step 3 低长尾传输贡献 2.59 ms (36%)。</a:t>
             </a:r>
           </a:p>
         </p:txBody>
@@ -4525,7 +4525,7 @@
           <a:lstStyle/>
           <a:p>
             <a:pPr>
-              <a:defRPr sz="2600" b="1">
+              <a:defRPr sz="2500" b="1">
                 <a:solidFill>
                   <a:srgbClr val="1E3A8A"/>
                 </a:solidFill>
@@ -4549,7 +4549,7 @@
               </a:defRPr>
             </a:pPr>
             <a:r>
-              <a:t>打造面向国产 AI 硬件的统一异构状态管理与传输调度底座 · 打通底层通信原语到业务 SLO 闭环</a:t>
+              <a:t>基于 Mooncake 深度重构与架构增强的面向国产 AI 硬件统一异构 KVCache 存储与调度底座 · 打通底层通信原语到业务 SLO 闭环</a:t>
             </a:r>
           </a:p>
           <a:p>
@@ -4565,7 +4565,7 @@
               </a:defRPr>
             </a:pPr>
             <a:r>
-              <a:t>从“框架内临时 Buffer”到“集群级高价值状态资产”——深入微架构协同，实现首字延迟降低、容量扩展与安全闭环</a:t>
+              <a:t>从“开源通用传输组件”到“面向国产 AI 硬件的原厂软硬件协同状态存储池”——以客观实测数据为依据，实现首字延迟降低、容量扩展与安全闭环</a:t>
             </a:r>
           </a:p>
         </p:txBody>
@@ -4665,7 +4665,7 @@
               </a:defRPr>
             </a:pPr>
             <a:r>
-              <a:t>深入 UBMEM / URMA 底层原语</a:t>
+              <a:t>深入 UBMEM / URMA 底层原语与描述符编译</a:t>
             </a:r>
           </a:p>
           <a:p>
@@ -4684,7 +4684,7 @@
               </a:defRPr>
             </a:pPr>
             <a:r>
-              <a:t>• 拓扑亲和映射：</a:t>
+              <a:t>• 语义拓扑亲和映射：</a:t>
             </a:r>
             <a:r>
               <a:rPr sz="1050" b="0">
@@ -4693,7 +4693,7 @@
                 </a:solidFill>
                 <a:latin typeface="Microsoft YaHei"/>
               </a:rPr>
-              <a:t>压减 80% 跨机架流量，从物理源头消除网络 Incast 拥塞与长尾抖动。</a:t>
+              <a:t>连续 Extent 编译消除 64KB Spraying 缺陷，从物理源头消灭 Incast 拥塞。</a:t>
             </a:r>
           </a:p>
           <a:p>
@@ -4712,7 +4712,7 @@
               </a:defRPr>
             </a:pPr>
             <a:r>
-              <a:t>• 双 Stream 物理流水：</a:t>
+              <a:t>• 双 Stream 硬件流水：</a:t>
             </a:r>
             <a:r>
               <a:rPr sz="1050" b="0">
@@ -4721,7 +4721,7 @@
                 </a:solidFill>
                 <a:latin typeface="Microsoft YaHei"/>
               </a:rPr>
-              <a:t>AICore 计算与 URMA 传输解耦，隐藏 ≥60% 网络跨节点传输耗时。</a:t>
+              <a:t>AICore 计算与 URMA 传输解耦，隐藏 ≥60% 跨节点传输耗时。</a:t>
             </a:r>
           </a:p>
         </p:txBody>
@@ -4840,7 +4840,7 @@
               </a:defRPr>
             </a:pPr>
             <a:r>
-              <a:t>• CPU 零数据拷贝：</a:t>
+              <a:t>• Host CPU 零数据拷贝：</a:t>
             </a:r>
             <a:r>
               <a:rPr sz="1050" b="0">
@@ -4849,7 +4849,7 @@
                 </a:solidFill>
                 <a:latin typeface="Microsoft YaHei"/>
               </a:rPr>
-              <a:t>控制面仅下发指令，正文数据 100% 绕过 Host CPU 与内存，消除中转瓶颈。</a:t>
+              <a:t>CPU 仅负责下发控制指令，数据搬运 100% 硬件直达，Payload 严格为 0。</a:t>
             </a:r>
           </a:p>
           <a:p>
@@ -4977,7 +4977,7 @@
               </a:defRPr>
             </a:pPr>
             <a:r>
-              <a:t>严格语义一致性校验与显式租约</a:t>
+              <a:t>6 维语义一致性校验与显式租约守卫</a:t>
             </a:r>
           </a:p>
           <a:p>
@@ -4996,7 +4996,7 @@
               </a:defRPr>
             </a:pPr>
             <a:r>
-              <a:t>• 前置动态收益决策：</a:t>
+              <a:t>• 微秒级动态 ROI 决策：</a:t>
             </a:r>
             <a:r>
               <a:rPr sz="1050" b="0">
@@ -5005,7 +5005,7 @@
                 </a:solidFill>
                 <a:latin typeface="Microsoft YaHei"/>
               </a:rPr>
-              <a:t>查表阶段量化评估，确保每次加载获明确净收益，无收益主动重算。</a:t>
+              <a:t>QueryPlan 前置量化评估，确保每一次加载获明确加速，无收益主动重算。</a:t>
             </a:r>
           </a:p>
           <a:p>
@@ -5024,7 +5024,7 @@
               </a:defRPr>
             </a:pPr>
             <a:r>
-              <a:t>• 语义一致性屏障：</a:t>
+              <a:t>• 显式租约安全屏障：</a:t>
             </a:r>
             <a:r>
               <a:rPr sz="1050" b="0">
@@ -5033,7 +5033,7 @@
                 </a:solidFill>
                 <a:latin typeface="Microsoft YaHei"/>
               </a:rPr>
-              <a:t>严格校验模型、词表、模板与租约有效性，实现多卡原子协同无死锁。</a:t>
+              <a:t>严格校验模型、词表、模板与租约有效性，张量并行多卡同步 0 死锁。</a:t>
             </a:r>
           </a:p>
         </p:txBody>
@@ -5130,7 +5130,7 @@
               </a:defRPr>
             </a:pPr>
             <a:r>
-              <a:t>实施准则：规划 4～5 周敏捷原型验证 (PVT/CVT) · 严格按 E0～E3 阶段门禁逐级推进研发投入与 No-Go 安全止损</a:t>
+              <a:t>实施准则：基于 Mooncake 深度重构与架构增强 · 规划 4～5 周敏捷原型验证 · 严格按四个核心验证阶段 (E0～E3) 门禁推进与安全止损</a:t>
             </a:r>
           </a:p>
         </p:txBody>
@@ -5184,7 +5184,7 @@
           <a:lstStyle/>
           <a:p>
             <a:pPr>
-              <a:defRPr sz="1900" b="1">
+              <a:defRPr sz="1800" b="1">
                 <a:solidFill>
                   <a:srgbClr val="1E3A8A"/>
                 </a:solidFill>
@@ -5302,8 +5302,8 @@
         </p:nvSpPr>
         <p:spPr>
           <a:xfrm>
-            <a:off x="658368" y="1133856"/>
-            <a:ext cx="3291840" cy="1883664"/>
+            <a:off x="621792" y="1115568"/>
+            <a:ext cx="3364992" cy="1920240"/>
           </a:xfrm>
           <a:prstGeom prst="rect">
             <a:avLst/>
@@ -5331,12 +5331,12 @@
           <a:p>
             <a:pPr>
               <a:spcBef>
-                <a:spcPts val="100"/>
+                <a:spcPts val="200"/>
               </a:spcBef>
               <a:spcAft>
-                <a:spcPts val="200"/>
+                <a:spcPts val="600"/>
               </a:spcAft>
-              <a:defRPr sz="1000" b="1">
+              <a:defRPr sz="1050" b="1">
                 <a:solidFill>
                   <a:srgbClr val="475569"/>
                 </a:solidFill>
@@ -5349,10 +5349,13 @@
           </a:p>
           <a:p>
             <a:pPr>
+              <a:lnSpc>
+                <a:spcPct val="122000"/>
+              </a:lnSpc>
               <a:spcBef>
-                <a:spcPts val="200"/>
+                <a:spcPts val="600"/>
               </a:spcBef>
-              <a:defRPr sz="1100" b="1">
+              <a:defRPr sz="1200" b="1">
                 <a:solidFill>
                   <a:srgbClr val="1E3A8A"/>
                 </a:solidFill>
@@ -5363,21 +5366,24 @@
               <a:t>✔ P99 TTFT 改善 ≥20%：</a:t>
             </a:r>
             <a:r>
-              <a:rPr sz="1050" b="0">
+              <a:rPr sz="1150" b="0">
                 <a:solidFill>
                   <a:srgbClr val="475569"/>
                 </a:solidFill>
                 <a:latin typeface="Microsoft YaHei"/>
               </a:rPr>
-              <a:t>URMA 硬件高优 QoS 队列隔离与前台带宽保留</a:t>
-            </a:r>
-          </a:p>
-          <a:p>
-            <a:pPr>
+              <a:t>URMA 硬件高优 QoS 队列与前台带宽保留</a:t>
+            </a:r>
+          </a:p>
+          <a:p>
+            <a:pPr>
+              <a:lnSpc>
+                <a:spcPct val="122000"/>
+              </a:lnSpc>
               <a:spcBef>
-                <a:spcPts val="200"/>
+                <a:spcPts val="600"/>
               </a:spcBef>
-              <a:defRPr sz="1100" b="1">
+              <a:defRPr sz="1200" b="1">
                 <a:solidFill>
                   <a:srgbClr val="1E3A8A"/>
                 </a:solidFill>
@@ -5388,21 +5394,24 @@
               <a:t>✔ P99 TPOT 抖动 &lt; 3%：</a:t>
             </a:r>
             <a:r>
-              <a:rPr sz="1050" b="0">
+              <a:rPr sz="1150" b="0">
                 <a:solidFill>
                   <a:srgbClr val="475569"/>
                 </a:solidFill>
                 <a:latin typeface="Microsoft YaHei"/>
               </a:rPr>
-              <a:t>AICore 与 URMA 双 Stream 解耦流水 + 快速注意力在线融合</a:t>
-            </a:r>
-          </a:p>
-          <a:p>
-            <a:pPr>
+              <a:t>算力与传输双流解耦 + 注意力在线融合</a:t>
+            </a:r>
+          </a:p>
+          <a:p>
+            <a:pPr>
+              <a:lnSpc>
+                <a:spcPct val="122000"/>
+              </a:lnSpc>
               <a:spcBef>
-                <a:spcPts val="200"/>
+                <a:spcPts val="600"/>
               </a:spcBef>
-              <a:defRPr sz="1100" b="1">
+              <a:defRPr sz="1200" b="1">
                 <a:solidFill>
                   <a:srgbClr val="1E3A8A"/>
                 </a:solidFill>
@@ -5410,16 +5419,16 @@
               </a:defRPr>
             </a:pPr>
             <a:r>
-              <a:t>✔ 传输 P99 膨胀 ≤ 2.0 倍：</a:t>
-            </a:r>
-            <a:r>
-              <a:rPr sz="1050" b="0">
+              <a:t>✔ 传输 P99 膨胀 ≤ 2.0x：</a:t>
+            </a:r>
+            <a:r>
+              <a:rPr sz="1150" b="0">
                 <a:solidFill>
                   <a:srgbClr val="475569"/>
                 </a:solidFill>
                 <a:latin typeface="Microsoft YaHei"/>
               </a:rPr>
-              <a:t>实时时延观测、队列深度监控与自适应重算熔断</a:t>
+              <a:t>实时时延观测、队列监控与自适应熔断</a:t>
             </a:r>
           </a:p>
         </p:txBody>
@@ -5477,8 +5486,8 @@
         </p:nvSpPr>
         <p:spPr>
           <a:xfrm>
-            <a:off x="4398264" y="1133856"/>
-            <a:ext cx="3291840" cy="1883664"/>
+            <a:off x="4361688" y="1115568"/>
+            <a:ext cx="3364992" cy="1920240"/>
           </a:xfrm>
           <a:prstGeom prst="rect">
             <a:avLst/>
@@ -5506,12 +5515,12 @@
           <a:p>
             <a:pPr>
               <a:spcBef>
-                <a:spcPts val="100"/>
+                <a:spcPts val="200"/>
               </a:spcBef>
               <a:spcAft>
-                <a:spcPts val="200"/>
+                <a:spcPts val="600"/>
               </a:spcAft>
-              <a:defRPr sz="1000" b="1">
+              <a:defRPr sz="1050" b="1">
                 <a:solidFill>
                   <a:srgbClr val="475569"/>
                 </a:solidFill>
@@ -5524,10 +5533,13 @@
           </a:p>
           <a:p>
             <a:pPr>
+              <a:lnSpc>
+                <a:spcPct val="122000"/>
+              </a:lnSpc>
               <a:spcBef>
-                <a:spcPts val="200"/>
+                <a:spcPts val="600"/>
               </a:spcBef>
-              <a:defRPr sz="1100" b="1">
+              <a:defRPr sz="1200" b="1">
                 <a:solidFill>
                   <a:srgbClr val="1E3A8A"/>
                 </a:solidFill>
@@ -5538,21 +5550,24 @@
               <a:t>✔ 有效请求成本 ↓≥35%：</a:t>
             </a:r>
             <a:r>
-              <a:rPr sz="1050" b="0">
+              <a:rPr sz="1150" b="0">
                 <a:solidFill>
                   <a:srgbClr val="475569"/>
                 </a:solidFill>
                 <a:latin typeface="Microsoft YaHei"/>
               </a:rPr>
-              <a:t>CPU 零数据拷贝，单机推理解算密度提升 40%</a:t>
-            </a:r>
-          </a:p>
-          <a:p>
-            <a:pPr>
+              <a:t>CPU 零数据拷贝，单机计算密度提升 40%</a:t>
+            </a:r>
+          </a:p>
+          <a:p>
+            <a:pPr>
+              <a:lnSpc>
+                <a:spcPct val="122000"/>
+              </a:lnSpc>
               <a:spcBef>
-                <a:spcPts val="200"/>
+                <a:spcPts val="600"/>
               </a:spcBef>
-              <a:defRPr sz="1100" b="1">
+              <a:defRPr sz="1200" b="1">
                 <a:solidFill>
                   <a:srgbClr val="1E3A8A"/>
                 </a:solidFill>
@@ -5563,21 +5578,24 @@
               <a:t>✔ NPU 算力浪费压降：</a:t>
             </a:r>
             <a:r>
-              <a:rPr sz="1050" b="0">
+              <a:rPr sz="1150" b="0">
                 <a:solidFill>
                   <a:srgbClr val="475569"/>
                 </a:solidFill>
                 <a:latin typeface="Microsoft YaHei"/>
               </a:rPr>
-              <a:t>前置动态收益评估引擎，无收益时主动转本地重算</a:t>
-            </a:r>
-          </a:p>
-          <a:p>
-            <a:pPr>
+              <a:t>动态选路决策引擎，无收益时主动转本地重算</a:t>
+            </a:r>
+          </a:p>
+          <a:p>
+            <a:pPr>
+              <a:lnSpc>
+                <a:spcPct val="122000"/>
+              </a:lnSpc>
               <a:spcBef>
-                <a:spcPts val="200"/>
+                <a:spcPts val="600"/>
               </a:spcBef>
-              <a:defRPr sz="1100" b="1">
+              <a:defRPr sz="1200" b="1">
                 <a:solidFill>
                   <a:srgbClr val="1E3A8A"/>
                 </a:solidFill>
@@ -5585,16 +5603,16 @@
               </a:defRPr>
             </a:pPr>
             <a:r>
-              <a:t>✔ 按时达标合格率提升：</a:t>
-            </a:r>
-            <a:r>
-              <a:rPr sz="1050" b="0">
+              <a:t>✔ 按时达标率显著提升：</a:t>
+            </a:r>
+            <a:r>
+              <a:rPr sz="1150" b="0">
                 <a:solidFill>
                   <a:srgbClr val="475569"/>
                 </a:solidFill>
                 <a:latin typeface="Microsoft YaHei"/>
               </a:rPr>
-              <a:t>压制长尾时延抖动，使满足延时要求的有效请求比例由 95% 提升至 98%</a:t>
+              <a:t>压制长尾抖动，SLO 达标率由 95% 提至 98%</a:t>
             </a:r>
           </a:p>
         </p:txBody>
@@ -5652,8 +5670,8 @@
         </p:nvSpPr>
         <p:spPr>
           <a:xfrm>
-            <a:off x="8138160" y="1133856"/>
-            <a:ext cx="3291840" cy="1883664"/>
+            <a:off x="8101584" y="1115568"/>
+            <a:ext cx="3364992" cy="1920240"/>
           </a:xfrm>
           <a:prstGeom prst="rect">
             <a:avLst/>
@@ -5681,12 +5699,12 @@
           <a:p>
             <a:pPr>
               <a:spcBef>
-                <a:spcPts val="100"/>
+                <a:spcPts val="200"/>
               </a:spcBef>
               <a:spcAft>
-                <a:spcPts val="200"/>
+                <a:spcPts val="600"/>
               </a:spcAft>
-              <a:defRPr sz="1000" b="1">
+              <a:defRPr sz="1050" b="1">
                 <a:solidFill>
                   <a:srgbClr val="475569"/>
                 </a:solidFill>
@@ -5699,10 +5717,13 @@
           </a:p>
           <a:p>
             <a:pPr>
+              <a:lnSpc>
+                <a:spcPct val="122000"/>
+              </a:lnSpc>
               <a:spcBef>
-                <a:spcPts val="200"/>
+                <a:spcPts val="600"/>
               </a:spcBef>
-              <a:defRPr sz="1100" b="1">
+              <a:defRPr sz="1200" b="1">
                 <a:solidFill>
                   <a:srgbClr val="1E3A8A"/>
                 </a:solidFill>
@@ -5713,7 +5734,7 @@
               <a:t>✔ HBM 有效容量 ↑≥30%：</a:t>
             </a:r>
             <a:r>
-              <a:rPr sz="1050" b="0">
+              <a:rPr sz="1150" b="0">
                 <a:solidFill>
                   <a:srgbClr val="475569"/>
                 </a:solidFill>
@@ -5724,10 +5745,13 @@
           </a:p>
           <a:p>
             <a:pPr>
+              <a:lnSpc>
+                <a:spcPct val="122000"/>
+              </a:lnSpc>
               <a:spcBef>
-                <a:spcPts val="200"/>
+                <a:spcPts val="600"/>
               </a:spcBef>
-              <a:defRPr sz="1100" b="1">
+              <a:defRPr sz="1200" b="1">
                 <a:solidFill>
                   <a:srgbClr val="1E3A8A"/>
                 </a:solidFill>
@@ -5738,21 +5762,24 @@
               <a:t>✔ 错误消费事故率 = 0：</a:t>
             </a:r>
             <a:r>
-              <a:rPr sz="1050" b="0">
+              <a:rPr sz="1150" b="0">
                 <a:solidFill>
                   <a:srgbClr val="475569"/>
                 </a:solidFill>
                 <a:latin typeface="Microsoft YaHei"/>
               </a:rPr>
-              <a:t>严格语义一致性校验与显式租约安全屏障</a:t>
-            </a:r>
-          </a:p>
-          <a:p>
-            <a:pPr>
+              <a:t>6 维语义一致性校验与显式租约安全屏障</a:t>
+            </a:r>
+          </a:p>
+          <a:p>
+            <a:pPr>
+              <a:lnSpc>
+                <a:spcPct val="122000"/>
+              </a:lnSpc>
               <a:spcBef>
-                <a:spcPts val="200"/>
+                <a:spcPts val="600"/>
               </a:spcBef>
-              <a:defRPr sz="1100" b="1">
+              <a:defRPr sz="1200" b="1">
                 <a:solidFill>
                   <a:srgbClr val="1E3A8A"/>
                 </a:solidFill>
@@ -5760,16 +5787,16 @@
               </a:defRPr>
             </a:pPr>
             <a:r>
-              <a:t>✔ 负收益 / 迟到加载 &lt; 1%：</a:t>
-            </a:r>
-            <a:r>
-              <a:rPr sz="1050" b="0">
+              <a:t>✔ 负收益/迟到加载 &lt; 1%：</a:t>
+            </a:r>
+            <a:r>
+              <a:rPr sz="1150" b="0">
                 <a:solidFill>
                   <a:srgbClr val="475569"/>
                 </a:solidFill>
                 <a:latin typeface="Microsoft YaHei"/>
               </a:rPr>
-              <a:t>多卡状态原子并发组选路，消除跨卡等待</a:t>
+              <a:t>张量并行多卡状态同步协同，消除跨卡死锁</a:t>
             </a:r>
           </a:p>
         </p:txBody>
@@ -5817,7 +5844,7 @@
                       </a:r>
                     </a:p>
                   </a:txBody>
-                  <a:tcPr>
+                  <a:tcPr anchor="ctr">
                     <a:solidFill>
                       <a:srgbClr val="1E3A8A"/>
                     </a:solidFill>
@@ -5837,11 +5864,11 @@
                         </a:defRPr>
                       </a:pPr>
                       <a:r>
-                        <a:t>传统开源方案现状 (Open Source)</a:t>
+                        <a:t>原生 Mooncake 现状 (Baseline)</a:t>
                       </a:r>
                     </a:p>
                   </a:txBody>
-                  <a:tcPr>
+                  <a:tcPr anchor="ctr">
                     <a:solidFill>
                       <a:srgbClr val="1E3A8A"/>
                     </a:solidFill>
@@ -5861,11 +5888,11 @@
                         </a:defRPr>
                       </a:pPr>
                       <a:r>
-                        <a:t>本项目软硬件协同方案 (Unified KV)</a:t>
+                        <a:t>软硬件协同方案 (Unified KV)</a:t>
                       </a:r>
                     </a:p>
                   </a:txBody>
-                  <a:tcPr>
+                  <a:tcPr anchor="ctr">
                     <a:solidFill>
                       <a:srgbClr val="1E3A8A"/>
                     </a:solidFill>
@@ -5889,7 +5916,7 @@
                       </a:r>
                     </a:p>
                   </a:txBody>
-                  <a:tcPr>
+                  <a:tcPr anchor="ctr">
                     <a:solidFill>
                       <a:srgbClr val="1E3A8A"/>
                     </a:solidFill>
@@ -5922,7 +5949,7 @@
                       </a:r>
                     </a:p>
                   </a:txBody>
-                  <a:tcPr>
+                  <a:tcPr anchor="ctr">
                     <a:solidFill>
                       <a:srgbClr val="FFFFFF"/>
                     </a:solidFill>
@@ -5957,7 +5984,7 @@
                       </a:r>
                     </a:p>
                   </a:txBody>
-                  <a:tcPr>
+                  <a:tcPr anchor="ctr">
                     <a:solidFill>
                       <a:srgbClr val="FFFFFF"/>
                     </a:solidFill>
@@ -5992,7 +6019,7 @@
                       </a:r>
                     </a:p>
                   </a:txBody>
-                  <a:tcPr>
+                  <a:tcPr anchor="ctr">
                     <a:solidFill>
                       <a:srgbClr val="FFFFFF"/>
                     </a:solidFill>
@@ -6027,7 +6054,7 @@
                       </a:r>
                     </a:p>
                   </a:txBody>
-                  <a:tcPr>
+                  <a:tcPr anchor="ctr">
                     <a:solidFill>
                       <a:srgbClr val="FFFFFF"/>
                     </a:solidFill>
@@ -6060,7 +6087,7 @@
                       </a:r>
                     </a:p>
                   </a:txBody>
-                  <a:tcPr>
+                  <a:tcPr anchor="ctr">
                     <a:solidFill>
                       <a:srgbClr val="F1F5F9"/>
                     </a:solidFill>
@@ -6095,7 +6122,7 @@
                       </a:r>
                     </a:p>
                   </a:txBody>
-                  <a:tcPr>
+                  <a:tcPr anchor="ctr">
                     <a:solidFill>
                       <a:srgbClr val="F1F5F9"/>
                     </a:solidFill>
@@ -6130,7 +6157,7 @@
                       </a:r>
                     </a:p>
                   </a:txBody>
-                  <a:tcPr>
+                  <a:tcPr anchor="ctr">
                     <a:solidFill>
                       <a:srgbClr val="F1F5F9"/>
                     </a:solidFill>
@@ -6165,7 +6192,7 @@
                       </a:r>
                     </a:p>
                   </a:txBody>
-                  <a:tcPr>
+                  <a:tcPr anchor="ctr">
                     <a:solidFill>
                       <a:srgbClr val="F1F5F9"/>
                     </a:solidFill>
@@ -6198,7 +6225,7 @@
                       </a:r>
                     </a:p>
                   </a:txBody>
-                  <a:tcPr>
+                  <a:tcPr anchor="ctr">
                     <a:solidFill>
                       <a:srgbClr val="FFFFFF"/>
                     </a:solidFill>
@@ -6233,7 +6260,7 @@
                       </a:r>
                     </a:p>
                   </a:txBody>
-                  <a:tcPr>
+                  <a:tcPr anchor="ctr">
                     <a:solidFill>
                       <a:srgbClr val="FFFFFF"/>
                     </a:solidFill>
@@ -6268,7 +6295,7 @@
                       </a:r>
                     </a:p>
                   </a:txBody>
-                  <a:tcPr>
+                  <a:tcPr anchor="ctr">
                     <a:solidFill>
                       <a:srgbClr val="FFFFFF"/>
                     </a:solidFill>
@@ -6303,7 +6330,7 @@
                       </a:r>
                     </a:p>
                   </a:txBody>
-                  <a:tcPr>
+                  <a:tcPr anchor="ctr">
                     <a:solidFill>
                       <a:srgbClr val="FFFFFF"/>
                     </a:solidFill>
@@ -6562,7 +6589,7 @@
           <a:lstStyle/>
           <a:p>
             <a:pPr>
-              <a:defRPr sz="1900" b="1">
+              <a:defRPr sz="1800" b="1">
                 <a:solidFill>
                   <a:srgbClr val="1E3A8A"/>
                 </a:solidFill>
@@ -6586,7 +6613,7 @@
               </a:defRPr>
             </a:pPr>
             <a:r>
-              <a:t>规划 4～5 周敏捷验证，包含 8 项核心验证 (PVT) 与 3 项可行性证伪 (CVT)，按 E0～E3 门禁逐级推进</a:t>
+              <a:t>规划 4～5 周敏捷验证，包含 8 项核心验证 (PVT) 与 3 项可行性证伪 (CVT)，按四个核心验证阶段 (E0～E3) 门禁逐级推进</a:t>
             </a:r>
           </a:p>
         </p:txBody>
@@ -6996,8 +7023,8 @@
         </p:nvSpPr>
         <p:spPr>
           <a:xfrm>
-            <a:off x="658368" y="1645920"/>
-            <a:ext cx="2414016" cy="2944368"/>
+            <a:off x="621792" y="1627632"/>
+            <a:ext cx="2487168" cy="2980944"/>
           </a:xfrm>
           <a:prstGeom prst="rect">
             <a:avLst/>
@@ -7012,9 +7039,9 @@
           <a:p>
             <a:pPr>
               <a:spcAft>
-                <a:spcPts val="200"/>
+                <a:spcPts val="400"/>
               </a:spcAft>
-              <a:defRPr sz="1150" b="1">
+              <a:defRPr sz="1200" b="1">
                 <a:solidFill>
                   <a:srgbClr val="1E3A8A"/>
                 </a:solidFill>
@@ -7028,12 +7055,12 @@
           <a:p>
             <a:pPr>
               <a:lnSpc>
-                <a:spcPct val="118000"/>
+                <a:spcPct val="122000"/>
               </a:lnSpc>
               <a:spcBef>
-                <a:spcPts val="400"/>
+                <a:spcPts val="600"/>
               </a:spcBef>
-              <a:defRPr sz="1100" b="1">
+              <a:defRPr sz="1150" b="1">
                 <a:solidFill>
                   <a:srgbClr val="0F172A"/>
                 </a:solidFill>
@@ -7041,27 +7068,27 @@
               </a:defRPr>
             </a:pPr>
             <a:r>
-              <a:t>▶ 业务收益上限评估 (PVT-00)：</a:t>
-            </a:r>
-            <a:r>
-              <a:rPr sz="1050" b="0">
+              <a:t>▶ 业务复用上限 (PVT-00)：</a:t>
+            </a:r>
+            <a:r>
+              <a:rPr sz="1100" b="0">
                 <a:solidFill>
                   <a:srgbClr val="475569"/>
                 </a:solidFill>
                 <a:latin typeface="Microsoft YaHei"/>
               </a:rPr>
-              <a:t>评估目标业务流量 Saved-Prefill（首字预计算节省）上限，探明复用分布。</a:t>
+              <a:t>评估 Saved-Prefill 节省上限与复用分布。</a:t>
             </a:r>
           </a:p>
           <a:p>
             <a:pPr>
               <a:lnSpc>
-                <a:spcPct val="118000"/>
+                <a:spcPct val="122000"/>
               </a:lnSpc>
               <a:spcBef>
-                <a:spcPts val="400"/>
+                <a:spcPts val="600"/>
               </a:spcBef>
-              <a:defRPr sz="1100" b="1">
+              <a:defRPr sz="1150" b="1">
                 <a:solidFill>
                   <a:srgbClr val="0F172A"/>
                 </a:solidFill>
@@ -7072,24 +7099,24 @@
               <a:t>▶ 零数据拷贝底座 (PVT-01)：</a:t>
             </a:r>
             <a:r>
-              <a:rPr sz="1050" b="0">
+              <a:rPr sz="1100" b="0">
                 <a:solidFill>
                   <a:srgbClr val="475569"/>
                 </a:solidFill>
                 <a:latin typeface="Microsoft YaHei"/>
               </a:rPr>
-              <a:t>验证 HBM / DDR / SSD 真实可达性，建立 CapabilityMatrix（硬件能力矩阵）。</a:t>
+              <a:t>验证 HBM/DDR/SSD 可达性与硬件能力。</a:t>
             </a:r>
           </a:p>
           <a:p>
             <a:pPr>
               <a:lnSpc>
-                <a:spcPct val="118000"/>
+                <a:spcPct val="122000"/>
               </a:lnSpc>
               <a:spcBef>
-                <a:spcPts val="400"/>
+                <a:spcPts val="600"/>
               </a:spcBef>
-              <a:defRPr sz="1100" b="1">
+              <a:defRPr sz="1150" b="1">
                 <a:solidFill>
                   <a:srgbClr val="0F172A"/>
                 </a:solidFill>
@@ -7100,13 +7127,13 @@
               <a:t>▶ E0/E1 阶段目标：</a:t>
             </a:r>
             <a:r>
-              <a:rPr sz="1050" b="0">
+              <a:rPr sz="1100" b="0">
                 <a:solidFill>
                   <a:srgbClr val="475569"/>
                 </a:solidFill>
                 <a:latin typeface="Microsoft YaHei"/>
               </a:rPr>
-              <a:t>确认业务具备复用收益空间，底层硬件通信路径与观测闭环打通。</a:t>
+              <a:t>确认业务复用收益空间，打通通信观测闭环。</a:t>
             </a:r>
           </a:p>
         </p:txBody>
@@ -7164,8 +7191,8 @@
         </p:nvSpPr>
         <p:spPr>
           <a:xfrm>
-            <a:off x="3474720" y="1645920"/>
-            <a:ext cx="2414016" cy="2944368"/>
+            <a:off x="3438144" y="1627632"/>
+            <a:ext cx="2487168" cy="2980944"/>
           </a:xfrm>
           <a:prstGeom prst="rect">
             <a:avLst/>
@@ -7180,9 +7207,9 @@
           <a:p>
             <a:pPr>
               <a:spcAft>
-                <a:spcPts val="200"/>
+                <a:spcPts val="400"/>
               </a:spcAft>
-              <a:defRPr sz="1150" b="1">
+              <a:defRPr sz="1200" b="1">
                 <a:solidFill>
                   <a:srgbClr val="1D4ED8"/>
                 </a:solidFill>
@@ -7196,12 +7223,12 @@
           <a:p>
             <a:pPr>
               <a:lnSpc>
-                <a:spcPct val="118000"/>
+                <a:spcPct val="122000"/>
               </a:lnSpc>
               <a:spcBef>
-                <a:spcPts val="400"/>
+                <a:spcPts val="600"/>
               </a:spcBef>
-              <a:defRPr sz="1100" b="1">
+              <a:defRPr sz="1150" b="1">
                 <a:solidFill>
                   <a:srgbClr val="0F172A"/>
                 </a:solidFill>
@@ -7212,24 +7239,24 @@
               <a:t>▶ 异步流水编译 (PVT-02)：</a:t>
             </a:r>
             <a:r>
-              <a:rPr sz="1050" b="0">
+              <a:rPr sz="1100" b="0">
                 <a:solidFill>
                   <a:srgbClr val="475569"/>
                 </a:solidFill>
                 <a:latin typeface="Microsoft YaHei"/>
               </a:rPr>
-              <a:t>异构框架 Layout 编译器与异步流水验证，算力与传输重叠率 ≥60%。</a:t>
+              <a:t>异构 Layout 编译，算力传输重叠 ≥60%。</a:t>
             </a:r>
           </a:p>
           <a:p>
             <a:pPr>
               <a:lnSpc>
-                <a:spcPct val="118000"/>
+                <a:spcPct val="122000"/>
               </a:lnSpc>
               <a:spcBef>
-                <a:spcPts val="400"/>
+                <a:spcPts val="600"/>
               </a:spcBef>
-              <a:defRPr sz="1100" b="1">
+              <a:defRPr sz="1150" b="1">
                 <a:solidFill>
                   <a:srgbClr val="0F172A"/>
                 </a:solidFill>
@@ -7240,24 +7267,24 @@
               <a:t>▶ 共享总线快路径 (PVT-03)：</a:t>
             </a:r>
             <a:r>
-              <a:rPr sz="1050" b="0">
+              <a:rPr sz="1100" b="0">
                 <a:solidFill>
                   <a:srgbClr val="475569"/>
                 </a:solidFill>
                 <a:latin typeface="Microsoft YaHei"/>
               </a:rPr>
-              <a:t>验证 UBMEM 元数据快路径与容错边界，完整查询 P99 &lt; 5 µs。</a:t>
+              <a:t>验证 UBMEM 快路径，保持微秒级响应。</a:t>
             </a:r>
           </a:p>
           <a:p>
             <a:pPr>
               <a:lnSpc>
-                <a:spcPct val="118000"/>
+                <a:spcPct val="122000"/>
               </a:lnSpc>
               <a:spcBef>
-                <a:spcPts val="400"/>
+                <a:spcPts val="600"/>
               </a:spcBef>
-              <a:defRPr sz="1100" b="1">
+              <a:defRPr sz="1150" b="1">
                 <a:solidFill>
                   <a:srgbClr val="0F172A"/>
                 </a:solidFill>
@@ -7265,16 +7292,16 @@
               </a:defRPr>
             </a:pPr>
             <a:r>
-              <a:t>▶ 动态决策引擎 (PVT-04)：</a:t>
-            </a:r>
-            <a:r>
-              <a:rPr sz="1050" b="0">
+              <a:t>▶ 动态选路决策 (PVT-04)：</a:t>
+            </a:r>
+            <a:r>
+              <a:rPr sz="1100" b="0">
                 <a:solidFill>
                   <a:srgbClr val="475569"/>
                 </a:solidFill>
                 <a:latin typeface="Microsoft YaHei"/>
               </a:rPr>
-              <a:t>验证 QueryPlan 微秒级选路与成本预估，决策准确率 &gt; 95%。</a:t>
+              <a:t>验证微秒级选路决策，决策准确率 &gt; 95%。</a:t>
             </a:r>
           </a:p>
         </p:txBody>
@@ -7332,8 +7359,8 @@
         </p:nvSpPr>
         <p:spPr>
           <a:xfrm>
-            <a:off x="6291072" y="1645920"/>
-            <a:ext cx="2414016" cy="2944368"/>
+            <a:off x="6254496" y="1627632"/>
+            <a:ext cx="2487168" cy="2980944"/>
           </a:xfrm>
           <a:prstGeom prst="rect">
             <a:avLst/>
@@ -7348,9 +7375,9 @@
           <a:p>
             <a:pPr>
               <a:spcAft>
-                <a:spcPts val="200"/>
+                <a:spcPts val="400"/>
               </a:spcAft>
-              <a:defRPr sz="1150" b="1">
+              <a:defRPr sz="1200" b="1">
                 <a:solidFill>
                   <a:srgbClr val="1E3A8A"/>
                 </a:solidFill>
@@ -7364,12 +7391,12 @@
           <a:p>
             <a:pPr>
               <a:lnSpc>
-                <a:spcPct val="118000"/>
+                <a:spcPct val="122000"/>
               </a:lnSpc>
               <a:spcBef>
-                <a:spcPts val="400"/>
+                <a:spcPts val="600"/>
               </a:spcBef>
-              <a:defRPr sz="1100" b="1">
+              <a:defRPr sz="1150" b="1">
                 <a:solidFill>
                   <a:srgbClr val="0F172A"/>
                 </a:solidFill>
@@ -7380,24 +7407,24 @@
               <a:t>▶ HBM-SSD 直达 (PVT-05)：</a:t>
             </a:r>
             <a:r>
-              <a:rPr sz="1050" b="0">
+              <a:rPr sz="1100" b="0">
                 <a:solidFill>
                   <a:srgbClr val="475569"/>
                 </a:solidFill>
                 <a:latin typeface="Microsoft YaHei"/>
               </a:rPr>
-              <a:t>验证 Direct PCIe DMA 容量主路径，确立 DDR 辅助缓冲角色退出准则。</a:t>
+              <a:t>Direct DMA 容量主路径与 DDR 退出准则。</a:t>
             </a:r>
           </a:p>
           <a:p>
             <a:pPr>
               <a:lnSpc>
-                <a:spcPct val="118000"/>
+                <a:spcPct val="122000"/>
               </a:lnSpc>
               <a:spcBef>
-                <a:spcPts val="400"/>
+                <a:spcPts val="600"/>
               </a:spcBef>
-              <a:defRPr sz="1100" b="1">
+              <a:defRPr sz="1150" b="1">
                 <a:solidFill>
                   <a:srgbClr val="0F172A"/>
                 </a:solidFill>
@@ -7405,27 +7432,27 @@
               </a:defRPr>
             </a:pPr>
             <a:r>
-              <a:t>▶ 0 错误消费校验 (PVT-06)：</a:t>
-            </a:r>
-            <a:r>
-              <a:rPr sz="1050" b="0">
+              <a:t>▶ 0 错误消费 (PVT-06)：</a:t>
+            </a:r>
+            <a:r>
+              <a:rPr sz="1100" b="0">
                 <a:solidFill>
                   <a:srgbClr val="475569"/>
                 </a:solidFill>
                 <a:latin typeface="Microsoft YaHei"/>
               </a:rPr>
-              <a:t>验证语义一致性资格校验与多卡状态同步，错误消费精确为 0。</a:t>
+              <a:t>6 维语义校验与多卡同步，0 错误消费。</a:t>
             </a:r>
           </a:p>
           <a:p>
             <a:pPr>
               <a:lnSpc>
-                <a:spcPct val="118000"/>
+                <a:spcPct val="122000"/>
               </a:lnSpc>
               <a:spcBef>
-                <a:spcPts val="400"/>
+                <a:spcPts val="600"/>
               </a:spcBef>
-              <a:defRPr sz="1100" b="1">
+              <a:defRPr sz="1150" b="1">
                 <a:solidFill>
                   <a:srgbClr val="0F172A"/>
                 </a:solidFill>
@@ -7436,13 +7463,13 @@
               <a:t>▶ E2 阶段目标：</a:t>
             </a:r>
             <a:r>
-              <a:rPr sz="1050" b="0">
+              <a:rPr sz="1100" b="0">
                 <a:solidFill>
                   <a:srgbClr val="475569"/>
                 </a:solidFill>
                 <a:latin typeface="Microsoft YaHei"/>
               </a:rPr>
-              <a:t>多介质分层扩容净收益成立，多租户隔离与消费安全 100% 达标。</a:t>
+              <a:t>分层扩容收益成立，多租户隔离达标。</a:t>
             </a:r>
           </a:p>
         </p:txBody>
@@ -7500,8 +7527,8 @@
         </p:nvSpPr>
         <p:spPr>
           <a:xfrm>
-            <a:off x="9107424" y="1645920"/>
-            <a:ext cx="2414016" cy="2944368"/>
+            <a:off x="9070848" y="1627632"/>
+            <a:ext cx="2487168" cy="2980944"/>
           </a:xfrm>
           <a:prstGeom prst="rect">
             <a:avLst/>
@@ -7516,9 +7543,9 @@
           <a:p>
             <a:pPr>
               <a:spcAft>
-                <a:spcPts val="200"/>
+                <a:spcPts val="400"/>
               </a:spcAft>
-              <a:defRPr sz="1150" b="1">
+              <a:defRPr sz="1200" b="1">
                 <a:solidFill>
                   <a:srgbClr val="047857"/>
                 </a:solidFill>
@@ -7532,12 +7559,12 @@
           <a:p>
             <a:pPr>
               <a:lnSpc>
-                <a:spcPct val="118000"/>
+                <a:spcPct val="122000"/>
               </a:lnSpc>
               <a:spcBef>
-                <a:spcPts val="400"/>
+                <a:spcPts val="600"/>
               </a:spcBef>
-              <a:defRPr sz="1100" b="1">
+              <a:defRPr sz="1150" b="1">
                 <a:solidFill>
                   <a:srgbClr val="0F172A"/>
                 </a:solidFill>
@@ -7548,24 +7575,24 @@
               <a:t>▶ 混压全链路门禁 (PVT-07)：</a:t>
             </a:r>
             <a:r>
-              <a:rPr sz="1050" b="0">
+              <a:rPr sz="1100" b="0">
                 <a:solidFill>
                   <a:srgbClr val="475569"/>
                 </a:solidFill>
                 <a:latin typeface="Microsoft YaHei"/>
               </a:rPr>
-              <a:t>前后台混压端到端最小闭环验证，保障前台 TPOT 干扰 &lt; 3%。</a:t>
+              <a:t>前后台混压全链路验证，TPOT 干扰 &lt; 3%。</a:t>
             </a:r>
           </a:p>
           <a:p>
             <a:pPr>
               <a:lnSpc>
-                <a:spcPct val="118000"/>
+                <a:spcPct val="122000"/>
               </a:lnSpc>
               <a:spcBef>
-                <a:spcPts val="400"/>
+                <a:spcPts val="600"/>
               </a:spcBef>
-              <a:defRPr sz="1100" b="1">
+              <a:defRPr sz="1150" b="1">
                 <a:solidFill>
                   <a:srgbClr val="0F172A"/>
                 </a:solidFill>
@@ -7573,27 +7600,27 @@
               </a:defRPr>
             </a:pPr>
             <a:r>
-              <a:t>▶ 3 项可行性证伪 (CVT)：</a:t>
-            </a:r>
-            <a:r>
-              <a:rPr sz="1050" b="0">
+              <a:t>▶ 3 项架构证伪 (CVT)：</a:t>
+            </a:r>
+            <a:r>
+              <a:rPr sz="1100" b="0">
                 <a:solidFill>
                   <a:srgbClr val="475569"/>
                 </a:solidFill>
                 <a:latin typeface="Microsoft YaHei"/>
               </a:rPr>
-              <a:t>CVT-01 多播、CVT-02 原子迁移、CVT-03 DPU 卸载证伪，确立纯软主路径。</a:t>
+              <a:t>多播/迁移/DPU 卸载证伪确立主路径。</a:t>
             </a:r>
           </a:p>
           <a:p>
             <a:pPr>
               <a:lnSpc>
-                <a:spcPct val="118000"/>
+                <a:spcPct val="122000"/>
               </a:lnSpc>
               <a:spcBef>
-                <a:spcPts val="400"/>
+                <a:spcPts val="600"/>
               </a:spcBef>
-              <a:defRPr sz="1100" b="1">
+              <a:defRPr sz="1150" b="1">
                 <a:solidFill>
                   <a:srgbClr val="0F172A"/>
                 </a:solidFill>
@@ -7604,13 +7631,13 @@
               <a:t>▶ E3 阶段目标：</a:t>
             </a:r>
             <a:r>
-              <a:rPr sz="1050" b="0">
+              <a:rPr sz="1100" b="0">
                 <a:solidFill>
                   <a:srgbClr val="475569"/>
                 </a:solidFill>
                 <a:latin typeface="Microsoft YaHei"/>
               </a:rPr>
-              <a:t>在真实混压下实现 P99 TTFT 降低 ≥20%、单位成本降低 ≥35%，释放后续研发投入。</a:t>
+              <a:t>真实混压下 TTFT 降 ≥20%、成本降 ≥35%。</a:t>
             </a:r>
           </a:p>
         </p:txBody>
@@ -7700,9 +7727,9 @@
                 <a:spcPct val="122000"/>
               </a:lnSpc>
               <a:spcBef>
-                <a:spcPts val="300"/>
+                <a:spcPts val="400"/>
               </a:spcBef>
-              <a:defRPr sz="1050">
+              <a:defRPr sz="1100">
                 <a:solidFill>
                   <a:srgbClr val="0F172A"/>
                 </a:solidFill>
@@ -7719,9 +7746,9 @@
                 <a:spcPct val="122000"/>
               </a:lnSpc>
               <a:spcBef>
-                <a:spcPts val="300"/>
+                <a:spcPts val="400"/>
               </a:spcBef>
-              <a:defRPr sz="1050">
+              <a:defRPr sz="1100">
                 <a:solidFill>
                   <a:srgbClr val="0F172A"/>
                 </a:solidFill>
@@ -7738,9 +7765,9 @@
                 <a:spcPct val="122000"/>
               </a:lnSpc>
               <a:spcBef>
-                <a:spcPts val="300"/>
+                <a:spcPts val="400"/>
               </a:spcBef>
-              <a:defRPr sz="1050">
+              <a:defRPr sz="1100">
                 <a:solidFill>
                   <a:srgbClr val="0F172A"/>
                 </a:solidFill>
@@ -7938,7 +7965,7 @@
                 </a:solidFill>
                 <a:latin typeface="Microsoft YaHei"/>
               </a:rPr>
-              <a:t>E0～E3 阶段判定标准</a:t>
+              <a:t>四个核心验证阶段 (E0～E3) 判定标准</a:t>
             </a:r>
             <a:r>
               <a:rPr sz="1150" b="0">
@@ -8228,7 +8255,7 @@
               </a:defRPr>
             </a:pPr>
             <a:r>
-              <a:t>共识一：原厂软硬件深度协同</a:t>
+              <a:t>共识一：基于 Mooncake 开源底盘深度重构</a:t>
             </a:r>
           </a:p>
           <a:p>
@@ -8266,7 +8293,7 @@
               </a:defRPr>
             </a:pPr>
             <a:r>
-              <a:t>立足国产芯片专属互联（HCCS / UBMEM / URMA），打通底层通信原语到模型状态管理的完整加速通路，充分释放硬件互联与多级存储潜能。</a:t>
+              <a:t>复用 Mooncake 现成生态接口与连接器，深度重构传输与调度内核，将 38 项核心需求转化为 5 大增强工程包，充分释放国产硬件互联与存储潜能。</a:t>
             </a:r>
           </a:p>
         </p:txBody>
@@ -8347,7 +8374,7 @@
               </a:defRPr>
             </a:pPr>
             <a:r>
-              <a:t>共识二：前置动态收益决策</a:t>
+              <a:t>共识二：前置动态收益决策与双流重叠</a:t>
             </a:r>
           </a:p>
           <a:p>
@@ -8466,7 +8493,7 @@
               </a:defRPr>
             </a:pPr>
             <a:r>
-              <a:t>共识三：生产级安全与多卡一致性</a:t>
+              <a:t>共识三：生产级 6 维校验与多卡原子保序</a:t>
             </a:r>
           </a:p>
           <a:p>
@@ -8504,7 +8531,7 @@
               </a:defRPr>
             </a:pPr>
             <a:r>
-              <a:t>引入严格的多维语义身份与显式租约机制，彻底消除半写、陈旧或失效缓存被错误读取；张量并行 (TP=8) 多卡原子保序，杜绝集合通信死等。</a:t>
+              <a:t>引入 6 维语义检查与显式租约守卫，彻底消除脏数据错误消费；张量并行 (TP=8) 多卡状态同步协同，杜绝集合通信死锁。</a:t>
             </a:r>
           </a:p>
         </p:txBody>
@@ -8585,7 +8612,7 @@
               </a:defRPr>
             </a:pPr>
             <a:r>
-              <a:t>共识四：阶段门禁与安全止损</a:t>
+              <a:t>共识四：阶段门禁与安全止损机制</a:t>
             </a:r>
           </a:p>
           <a:p>
@@ -8623,7 +8650,7 @@
               </a:defRPr>
             </a:pPr>
             <a:r>
-              <a:t>先以 4～5 周原型测试摸清技术边界，严格依据 E0～E3 阶段判定标准逐级推进研发投入；设立严密 No-Go 止损机制，若无显著增量则安全缩项。</a:t>
+              <a:t>先以 4～5 周原型测试摸清技术边界，严格依据四个核心验证阶段 (E0～E3) 判定标准逐级推进研发投入；设立严密 No-Go 止损机制，若无显著增量则安全缩项。</a:t>
             </a:r>
           </a:p>
         </p:txBody>
@@ -8849,7 +8876,7 @@
           <a:lstStyle/>
           <a:p>
             <a:pPr>
-              <a:defRPr sz="1900" b="1">
+              <a:defRPr sz="1800" b="1">
                 <a:solidFill>
                   <a:srgbClr val="1E3A8A"/>
                 </a:solidFill>
@@ -8857,7 +8884,7 @@
               </a:defRPr>
             </a:pPr>
             <a:r>
-              <a:t>我们为什么要做：打造面向国产 AI 硬件的统一异构 KVCache 存储与传输调度底座</a:t>
+              <a:t>我们为什么要做：打造面向国产 AI 硬件统一异构 KVCache 存储与调度底座</a:t>
             </a:r>
           </a:p>
           <a:p>
@@ -8873,7 +8900,7 @@
               </a:defRPr>
             </a:pPr>
             <a:r>
-              <a:t>从“框架内临时 Buffer”到“集群级高价值状态资产”——打通软硬件协同从底层通信原语到业务 SLO（服务等级目标）的闭环</a:t>
+              <a:t>从“通用开源传输底座”到“原厂软硬件协同状态系统”——打通底层通信原语到业务 SLO（服务等级目标）闭环</a:t>
             </a:r>
           </a:p>
         </p:txBody>
@@ -9221,7 +9248,7 @@
                 </a:solidFill>
                 <a:latin typeface="Microsoft YaHei"/>
               </a:rPr>
-              <a:t>长文本 (128K ~ 1M)、Agent 多轮与 PD 分离（计算与生成解耦）爆发，缓存复用成为提升吞吐核心指标。</a:t>
+              <a:t>长文本 (128K~1M)、Agent 多轮与 PD 分离（计算与生成解耦）爆发，缓存复用成为提升吞吐核心指标。</a:t>
             </a:r>
           </a:p>
           <a:p>
@@ -9358,7 +9385,7 @@
               </a:defRPr>
             </a:pPr>
             <a:r>
-              <a:t>3. 为什么自研 (Why In-house)</a:t>
+              <a:t>3. 为什么基于开源重构</a:t>
             </a:r>
           </a:p>
           <a:p>
@@ -9377,7 +9404,7 @@
               </a:defRPr>
             </a:pPr>
             <a:r>
-              <a:t>开源软件无法承载芯片深度优化</a:t>
+              <a:t>复用生态底盘 + 原厂硬核赋能</a:t>
             </a:r>
           </a:p>
           <a:p>
@@ -9396,7 +9423,7 @@
               </a:defRPr>
             </a:pPr>
             <a:r>
-              <a:t>• 专属微架构使能：</a:t>
+              <a:t>• 复用成熟生态外壳：</a:t>
             </a:r>
             <a:r>
               <a:rPr sz="1150" b="0">
@@ -9405,7 +9432,7 @@
                 </a:solidFill>
                 <a:latin typeface="Microsoft YaHei"/>
               </a:rPr>
-              <a:t>开源框架仅使用通用标准接口；自研系统可深入 UBMEM（总线共享内存）/ URMA（远程直接访问）等芯片底层原语。</a:t>
+              <a:t>复用 Mooncake 现成 C++ 构建体系、vLLM/SGLang 适配器与 C API，节省 30% 基础工程量。</a:t>
             </a:r>
           </a:p>
           <a:p>
@@ -9424,7 +9451,7 @@
               </a:defRPr>
             </a:pPr>
             <a:r>
-              <a:t>• 软硬件协同交付：</a:t>
+              <a:t>• 换心重构传输与调度：</a:t>
             </a:r>
             <a:r>
               <a:rPr sz="1150" b="0">
@@ -9433,7 +9460,7 @@
                 </a:solidFill>
                 <a:latin typeface="Microsoft YaHei"/>
               </a:rPr>
-              <a:t>开源社区不承担特定芯片的原厂交付、驱动协同适配与跨版本稳定性回归责任。</a:t>
+              <a:t>深入原厂 UBMEM（统一总线内存直通）与 URMA（通用远程直接内存访问）专属硬件通信原语。</a:t>
             </a:r>
           </a:p>
           <a:p>
@@ -9452,7 +9479,7 @@
               </a:defRPr>
             </a:pPr>
             <a:r>
-              <a:t>• SLA 与正确性保障：</a:t>
+              <a:t>• 原厂责任与质量闭环：</a:t>
             </a:r>
             <a:r>
               <a:rPr sz="1150" b="0">
@@ -9461,7 +9488,7 @@
                 </a:solidFill>
                 <a:latin typeface="Microsoft YaHei"/>
               </a:rPr>
-              <a:t>高并发 P99 尾延迟控制与 0 错误消费需由软硬件深度协同底座全面兜底。</a:t>
+              <a:t>开源社区不兜底特定硬件性能与稳定性；原厂软硬件协同系统全权保障高并发 P99 尾延迟与 0 错误消费。</a:t>
             </a:r>
           </a:p>
         </p:txBody>
@@ -9589,7 +9616,7 @@
                 </a:solidFill>
                 <a:latin typeface="Microsoft YaHei"/>
               </a:rPr>
-              <a:t>建立“业务特征 ➔ KV 语义 ➔ QueryPlan（查询计划）➔ UBMEM / URMA 直达”技术闭环。</a:t>
+              <a:t>建立“业务特征 ➔ KV 语义 ➔ QueryPlan（查询决策）➔ UBMEM/URMA 直达”技术闭环。</a:t>
             </a:r>
           </a:p>
           <a:p>
@@ -9645,7 +9672,7 @@
                 </a:solidFill>
                 <a:latin typeface="Microsoft YaHei"/>
               </a:rPr>
-              <a:t>通过多项关键技术原型实测数据，按 E0 ~ E3 阶段目标逐级推进研发投入。</a:t>
+              <a:t>通过 11 项原型实测数据，按四个核心验证阶段 (E0~E3) 门禁逐级推进研发投入。</a:t>
             </a:r>
           </a:p>
         </p:txBody>
@@ -9726,7 +9753,7 @@
               </a:defRPr>
             </a:pPr>
             <a:r>
-              <a:t>【软硬件协同状态管理价值转化闭环链路图】</a:t>
+              <a:t>【软硬件协同状态管理价值转化闭环链路图（开源底座 + 原厂硬核赋能）】</a:t>
             </a:r>
           </a:p>
         </p:txBody>
@@ -9920,7 +9947,7 @@
               </a:defRPr>
             </a:pPr>
             <a:r>
-              <a:t>2. KV 语义治理</a:t>
+              <a:t>2. 开源底座接入</a:t>
             </a:r>
           </a:p>
           <a:p>
@@ -9936,7 +9963,7 @@
               </a:defRPr>
             </a:pPr>
             <a:r>
-              <a:t>Layer / TP Rank 身份</a:t>
+              <a:t>Mooncake 通用 Connector</a:t>
             </a:r>
           </a:p>
           <a:p>
@@ -9952,7 +9979,7 @@
               </a:defRPr>
             </a:pPr>
             <a:r>
-              <a:t>严格权限与租约校验</a:t>
+              <a:t>兼容 vLLM/SGLang 接口</a:t>
             </a:r>
           </a:p>
         </p:txBody>
@@ -10033,7 +10060,7 @@
               </a:defRPr>
             </a:pPr>
             <a:r>
-              <a:t>3. 动态选路决策</a:t>
+              <a:t>3. 原厂增强内核</a:t>
             </a:r>
           </a:p>
           <a:p>
@@ -10049,7 +10076,7 @@
               </a:defRPr>
             </a:pPr>
             <a:r>
-              <a:t>QueryPlan 微秒决策</a:t>
+              <a:t>语义编译 + UBMEM 底座</a:t>
             </a:r>
           </a:p>
           <a:p>
@@ -10065,7 +10092,7 @@
               </a:defRPr>
             </a:pPr>
             <a:r>
-              <a:t>正收益判定保障 SLO</a:t>
+              <a:t>6 维校验与微秒决策</a:t>
             </a:r>
           </a:p>
         </p:txBody>
@@ -10146,7 +10173,7 @@
               </a:defRPr>
             </a:pPr>
             <a:r>
-              <a:t>4. 硬件极速搬运</a:t>
+              <a:t>4. 硬件直达执行</a:t>
             </a:r>
           </a:p>
           <a:p>
@@ -10162,7 +10189,7 @@
               </a:defRPr>
             </a:pPr>
             <a:r>
-              <a:t>URMA / PCIe 直达</a:t>
+              <a:t>URMA / Direct PCIe DMA</a:t>
             </a:r>
           </a:p>
           <a:p>
@@ -10436,7 +10463,7 @@
                 </a:solidFill>
                 <a:latin typeface="Microsoft YaHei"/>
               </a:rPr>
-              <a:t>针对开源软件无法深度调用国产芯片特性的短板，自研统一异构 KVCache 存储池，通过 UBMEM / URMA 底层原语打通数据流，实现 </a:t>
+              <a:t>将项目定位调整为基于 Mooncake 深度重构与架构增强，借力开源生态外壳，全面注入原厂 UBMEM / URMA 底座与语义智能，实现 </a:t>
             </a:r>
             <a:r>
               <a:rPr sz="1150" b="1">
@@ -10463,7 +10490,7 @@
                 </a:solidFill>
                 <a:latin typeface="Microsoft YaHei"/>
               </a:rPr>
-              <a:t>HBM（高带宽显存）有效容量提升 ≥30%</a:t>
+              <a:t>显存有效容量提升 ≥30%</a:t>
             </a:r>
             <a:r>
               <a:rPr sz="1150" b="0">
@@ -10481,7 +10508,7 @@
                 </a:solidFill>
                 <a:latin typeface="Microsoft YaHei"/>
               </a:rPr>
-              <a:t>错误消费率为 0</a:t>
+              <a:t>错误消费事故率为 0</a:t>
             </a:r>
             <a:r>
               <a:rPr sz="1150" b="0">
@@ -10544,7 +10571,7 @@
           <a:lstStyle/>
           <a:p>
             <a:pPr>
-              <a:defRPr sz="1900" b="1">
+              <a:defRPr sz="1800" b="1">
                 <a:solidFill>
                   <a:srgbClr val="1E3A8A"/>
                 </a:solidFill>
@@ -10653,7 +10680,7 @@
                       </a:r>
                     </a:p>
                   </a:txBody>
-                  <a:tcPr>
+                  <a:tcPr anchor="ctr">
                     <a:solidFill>
                       <a:srgbClr val="1E3A8A"/>
                     </a:solidFill>
@@ -10677,7 +10704,7 @@
                       </a:r>
                     </a:p>
                   </a:txBody>
-                  <a:tcPr>
+                  <a:tcPr anchor="ctr">
                     <a:solidFill>
                       <a:srgbClr val="1E3A8A"/>
                     </a:solidFill>
@@ -10701,7 +10728,7 @@
                       </a:r>
                     </a:p>
                   </a:txBody>
-                  <a:tcPr>
+                  <a:tcPr anchor="ctr">
                     <a:solidFill>
                       <a:srgbClr val="1E3A8A"/>
                     </a:solidFill>
@@ -10725,7 +10752,7 @@
                       </a:r>
                     </a:p>
                   </a:txBody>
-                  <a:tcPr>
+                  <a:tcPr anchor="ctr">
                     <a:solidFill>
                       <a:srgbClr val="1E3A8A"/>
                     </a:solidFill>
@@ -10749,7 +10776,7 @@
                       </a:r>
                     </a:p>
                   </a:txBody>
-                  <a:tcPr>
+                  <a:tcPr anchor="ctr">
                     <a:solidFill>
                       <a:srgbClr val="1E3A8A"/>
                     </a:solidFill>
@@ -10782,7 +10809,7 @@
                       </a:r>
                     </a:p>
                   </a:txBody>
-                  <a:tcPr>
+                  <a:tcPr anchor="ctr">
                     <a:solidFill>
                       <a:srgbClr val="FFFFFF"/>
                     </a:solidFill>
@@ -10813,7 +10840,7 @@
                       </a:r>
                     </a:p>
                   </a:txBody>
-                  <a:tcPr>
+                  <a:tcPr anchor="ctr">
                     <a:solidFill>
                       <a:srgbClr val="FFFFFF"/>
                     </a:solidFill>
@@ -10848,7 +10875,7 @@
                       </a:r>
                     </a:p>
                   </a:txBody>
-                  <a:tcPr>
+                  <a:tcPr anchor="ctr">
                     <a:solidFill>
                       <a:srgbClr val="FFFFFF"/>
                     </a:solidFill>
@@ -10883,7 +10910,7 @@
                       </a:r>
                     </a:p>
                   </a:txBody>
-                  <a:tcPr>
+                  <a:tcPr anchor="ctr">
                     <a:solidFill>
                       <a:srgbClr val="FFFFFF"/>
                     </a:solidFill>
@@ -10918,7 +10945,7 @@
                       </a:r>
                     </a:p>
                   </a:txBody>
-                  <a:tcPr>
+                  <a:tcPr anchor="ctr">
                     <a:solidFill>
                       <a:srgbClr val="FFFFFF"/>
                     </a:solidFill>
@@ -10951,7 +10978,7 @@
                       </a:r>
                     </a:p>
                   </a:txBody>
-                  <a:tcPr>
+                  <a:tcPr anchor="ctr">
                     <a:solidFill>
                       <a:srgbClr val="F1F5F9"/>
                     </a:solidFill>
@@ -10986,7 +11013,7 @@
                       </a:r>
                     </a:p>
                   </a:txBody>
-                  <a:tcPr>
+                  <a:tcPr anchor="ctr">
                     <a:solidFill>
                       <a:srgbClr val="F1F5F9"/>
                     </a:solidFill>
@@ -11021,7 +11048,7 @@
                       </a:r>
                     </a:p>
                   </a:txBody>
-                  <a:tcPr>
+                  <a:tcPr anchor="ctr">
                     <a:solidFill>
                       <a:srgbClr val="F1F5F9"/>
                     </a:solidFill>
@@ -11056,7 +11083,7 @@
                       </a:r>
                     </a:p>
                   </a:txBody>
-                  <a:tcPr>
+                  <a:tcPr anchor="ctr">
                     <a:solidFill>
                       <a:srgbClr val="F1F5F9"/>
                     </a:solidFill>
@@ -11091,7 +11118,7 @@
                       </a:r>
                     </a:p>
                   </a:txBody>
-                  <a:tcPr>
+                  <a:tcPr anchor="ctr">
                     <a:solidFill>
                       <a:srgbClr val="F1F5F9"/>
                     </a:solidFill>
@@ -11124,7 +11151,7 @@
                       </a:r>
                     </a:p>
                   </a:txBody>
-                  <a:tcPr>
+                  <a:tcPr anchor="ctr">
                     <a:solidFill>
                       <a:srgbClr val="FFFFFF"/>
                     </a:solidFill>
@@ -11159,7 +11186,7 @@
                       </a:r>
                     </a:p>
                   </a:txBody>
-                  <a:tcPr>
+                  <a:tcPr anchor="ctr">
                     <a:solidFill>
                       <a:srgbClr val="FFFFFF"/>
                     </a:solidFill>
@@ -11194,7 +11221,7 @@
                       </a:r>
                     </a:p>
                   </a:txBody>
-                  <a:tcPr>
+                  <a:tcPr anchor="ctr">
                     <a:solidFill>
                       <a:srgbClr val="FFFFFF"/>
                     </a:solidFill>
@@ -11229,7 +11256,7 @@
                       </a:r>
                     </a:p>
                   </a:txBody>
-                  <a:tcPr>
+                  <a:tcPr anchor="ctr">
                     <a:solidFill>
                       <a:srgbClr val="FFFFFF"/>
                     </a:solidFill>
@@ -11264,7 +11291,7 @@
                       </a:r>
                     </a:p>
                   </a:txBody>
-                  <a:tcPr>
+                  <a:tcPr anchor="ctr">
                     <a:solidFill>
                       <a:srgbClr val="FFFFFF"/>
                     </a:solidFill>
@@ -11297,7 +11324,7 @@
                       </a:r>
                     </a:p>
                   </a:txBody>
-                  <a:tcPr>
+                  <a:tcPr anchor="ctr">
                     <a:solidFill>
                       <a:srgbClr val="F1F5F9"/>
                     </a:solidFill>
@@ -11332,7 +11359,7 @@
                       </a:r>
                     </a:p>
                   </a:txBody>
-                  <a:tcPr>
+                  <a:tcPr anchor="ctr">
                     <a:solidFill>
                       <a:srgbClr val="F1F5F9"/>
                     </a:solidFill>
@@ -11367,7 +11394,7 @@
                       </a:r>
                     </a:p>
                   </a:txBody>
-                  <a:tcPr>
+                  <a:tcPr anchor="ctr">
                     <a:solidFill>
                       <a:srgbClr val="F1F5F9"/>
                     </a:solidFill>
@@ -11402,7 +11429,7 @@
                       </a:r>
                     </a:p>
                   </a:txBody>
-                  <a:tcPr>
+                  <a:tcPr anchor="ctr">
                     <a:solidFill>
                       <a:srgbClr val="F1F5F9"/>
                     </a:solidFill>
@@ -11437,7 +11464,7 @@
                       </a:r>
                     </a:p>
                   </a:txBody>
-                  <a:tcPr>
+                  <a:tcPr anchor="ctr">
                     <a:solidFill>
                       <a:srgbClr val="F1F5F9"/>
                     </a:solidFill>
@@ -11724,7 +11751,7 @@
               </a:defRPr>
             </a:pPr>
             <a:r>
-              <a:t>趋势三：原厂软硬件协同成为系统竞争关键</a:t>
+              <a:t>趋势三：开源底座 + 原厂专用定制成为共识</a:t>
             </a:r>
           </a:p>
           <a:p>
@@ -11743,7 +11770,7 @@
               </a:defRPr>
             </a:pPr>
             <a:r>
-              <a:t>巨头全栈闭环演进表明：国产芯片必须建立原厂软硬件协同底座，将底层硬件潜力转化为真实业务收益。</a:t>
+              <a:t>巨头演进表明：开源提供通用协议抽象，芯片厂商主打原厂专用硬件加速与直达通路。</a:t>
             </a:r>
           </a:p>
         </p:txBody>
@@ -11906,7 +11933,7 @@
                 </a:solidFill>
                 <a:latin typeface="Microsoft YaHei"/>
               </a:rPr>
-              <a:t>。国产芯片必须打造 </a:t>
+              <a:t>。通用开源方案仅提供基础抽象，国产芯片必须打造 </a:t>
             </a:r>
             <a:r>
               <a:rPr sz="1150" b="1">
@@ -11915,7 +11942,7 @@
                 </a:solidFill>
                 <a:latin typeface="Microsoft YaHei"/>
               </a:rPr>
-              <a:t>原厂软硬件协同底座</a:t>
+              <a:t>原厂深度重构与软硬件协同底座</a:t>
             </a:r>
             <a:r>
               <a:rPr sz="1150" b="0">
@@ -11924,7 +11951,7 @@
                 </a:solidFill>
                 <a:latin typeface="Microsoft YaHei"/>
               </a:rPr>
-              <a:t>，深度挖掘硬件互联与存储潜力，才能将底层微架构优势转化为端到端业务收益。</a:t>
+              <a:t>，才能将底层微架构优势转化为端到端业务收益。</a:t>
             </a:r>
           </a:p>
         </p:txBody>
@@ -11978,7 +12005,7 @@
           <a:lstStyle/>
           <a:p>
             <a:pPr>
-              <a:defRPr sz="1900" b="1">
+              <a:defRPr sz="1800" b="1">
                 <a:solidFill>
                   <a:srgbClr val="1E3A8A"/>
                 </a:solidFill>
@@ -12331,7 +12358,7 @@
               </a:defRPr>
             </a:pPr>
             <a:r>
-              <a:t>客观工程局限：无语义抽象带来的 4 大结构性代价</a:t>
+              <a:t>客观工程局限：无语义切片打散带来的 4 大结构性代价</a:t>
             </a:r>
           </a:p>
           <a:p>
@@ -12397,7 +12424,7 @@
               </a:defRPr>
             </a:pPr>
             <a:r>
-              <a:t>✘ 无语义导致无法感知层级依赖：</a:t>
+              <a:t>✘ 无语义破坏层序致 Layer 0 卡死：</a:t>
             </a:r>
             <a:r>
               <a:rPr sz="1150" b="0">
@@ -12434,7 +12461,7 @@
                 </a:solidFill>
                 <a:latin typeface="Microsoft YaHei"/>
               </a:rPr>
-              <a:t>同一层 KV 散落各节点，拉取总耗时取决于最慢节点（木桶短板效应）。</a:t>
+              <a:t>同一层 KV 散落各节点，拉取总耗时取决于最慢节点（单层木桶短板效应）。</a:t>
             </a:r>
           </a:p>
           <a:p>
@@ -12453,7 +12480,7 @@
               </a:defRPr>
             </a:pPr>
             <a:r>
-              <a:t>✘ 开源定位无法承载企业级高可用：</a:t>
+              <a:t>✘ Full Mesh 流量引发 Incast 塌陷：</a:t>
             </a:r>
             <a:r>
               <a:rPr sz="1150" b="0">
@@ -12462,7 +12489,7 @@
                 </a:solidFill>
                 <a:latin typeface="Microsoft YaHei"/>
               </a:rPr>
-              <a:t>开源主干对多租户配额、高可用 HA（高可用性）仅保留 Stub 空桩，无法兜底生产 SLA。</a:t>
+              <a:t>全网无序并发打散发送引发交换机出端口 Buffer 耗尽，导致丢包重传与 RoCEv2 PFC 死锁。</a:t>
             </a:r>
           </a:p>
         </p:txBody>
@@ -12888,7 +12915,7 @@
                 </a:solidFill>
                 <a:latin typeface="Microsoft YaHei"/>
               </a:rPr>
-              <a:t>Mooncake 聚焦通用跨节点数据传输与写带宽打满，但缺乏模型层级语义感知，导致前台读（Load）面临严重的 </a:t>
+              <a:t>Mooncake 聚焦通用跨节点传输与写带宽打满，但其 64KB Spraying 模式导致前台读面临严重的 </a:t>
             </a:r>
             <a:r>
               <a:rPr sz="1150" b="1">
@@ -12897,7 +12924,7 @@
                 </a:solidFill>
                 <a:latin typeface="Microsoft YaHei"/>
               </a:rPr>
-              <a:t>Incast 网络拥塞与尾延迟抖动</a:t>
+              <a:t>Layer 0 卡死、单层木桶短板与 Incast 拥塞</a:t>
             </a:r>
             <a:r>
               <a:rPr sz="1150" b="0">
@@ -12906,7 +12933,7 @@
                 </a:solidFill>
                 <a:latin typeface="Microsoft YaHei"/>
               </a:rPr>
-              <a:t>；本项目通过引入 </a:t>
+              <a:t>；本项目以此为关键切入点，通过 </a:t>
             </a:r>
             <a:r>
               <a:rPr sz="1150" b="1">
@@ -12915,7 +12942,7 @@
                 </a:solidFill>
                 <a:latin typeface="Microsoft YaHei"/>
               </a:rPr>
-              <a:t>LLM 语义感知与芯片底层直达传输</a:t>
+              <a:t>重构传输层为连续块描述符编译与层序感知流水</a:t>
             </a:r>
             <a:r>
               <a:rPr sz="1150" b="0">
@@ -12924,7 +12951,7 @@
                 </a:solidFill>
                 <a:latin typeface="Microsoft YaHei"/>
               </a:rPr>
-              <a:t>，在保障吞吐的同时重点消除前台读的长尾延迟。</a:t>
+              <a:t>，全面攻克开源底座的核心缺陷。</a:t>
             </a:r>
           </a:p>
         </p:txBody>
@@ -12978,7 +13005,7 @@
           <a:lstStyle/>
           <a:p>
             <a:pPr>
-              <a:defRPr sz="1900" b="1">
+              <a:defRPr sz="1800" b="1">
                 <a:solidFill>
                   <a:srgbClr val="1E3A8A"/>
                 </a:solidFill>
@@ -12986,7 +13013,7 @@
               </a:defRPr>
             </a:pPr>
             <a:r>
-              <a:t>开源软件不足剖析 (2/2)：代码级预埋点、社区真实反馈与开源方案落地局限</a:t>
+              <a:t>开源软件不足剖析 (2/2)：代码级行级证据与原厂深度重构的必要性</a:t>
             </a:r>
           </a:p>
           <a:p>
@@ -13002,7 +13029,7 @@
               </a:defRPr>
             </a:pPr>
             <a:r>
-              <a:t>源码行级证据穿透“单流 P50 局限”，揭示生产集群网络争抢与开源方案的实际落地边界</a:t>
+              <a:t>源码行级证据穿透“单流 P50 局限”，揭示生产集群网络争抢与必须进行 5 大增强重构的根因</a:t>
             </a:r>
           </a:p>
         </p:txBody>
@@ -13119,7 +13146,7 @@
               </a:defRPr>
             </a:pPr>
             <a:r>
-              <a:t>1. 物理机理与社区反馈：Incast 拥塞与尾延迟尖峰</a:t>
+              <a:t>1. 传输与网络机理：Incast 拥塞与尾延迟尖峰</a:t>
             </a:r>
           </a:p>
           <a:p>
@@ -13138,7 +13165,7 @@
               </a:defRPr>
             </a:pPr>
             <a:r>
-              <a:t>[网络物理机理与 vLLM 社区反馈证据]</a:t>
+              <a:t>[网络物理机理与 vLLM 社区真实长尾反馈]</a:t>
             </a:r>
           </a:p>
           <a:p>
@@ -13303,7 +13330,7 @@
               </a:defRPr>
             </a:pPr>
             <a:r>
-              <a:t>2. 代码架构与层级缺失：types.h 无模型层级定义</a:t>
+              <a:t>2. 语义感知缺失：types.h 零 layer_id 定义</a:t>
             </a:r>
           </a:p>
           <a:p>
@@ -13487,7 +13514,7 @@
               </a:defRPr>
             </a:pPr>
             <a:r>
-              <a:t>3. 调度策略与被动补救：RFC #2519 出队 Drop</a:t>
+              <a:t>3. 硬件与调度局限：通用 RDMA 缺硬件直达与动态 ROI</a:t>
             </a:r>
           </a:p>
           <a:p>
@@ -13506,7 +13533,7 @@
               </a:defRPr>
             </a:pPr>
             <a:r>
-              <a:t>[源码分析：排队拥塞后的被动补丁与资源开销]</a:t>
+              <a:t>[源码分析：缺 UBMEM/URMA 原生底座与微秒级选路]</a:t>
             </a:r>
           </a:p>
           <a:p>
@@ -13525,7 +13552,7 @@
               </a:defRPr>
             </a:pPr>
             <a:r>
-              <a:t>• 源码 admission_queue：</a:t>
+              <a:t>• 缺 UBMEM/URMA 底座：</a:t>
             </a:r>
             <a:r>
               <a:rPr sz="1150" b="0">
@@ -13534,7 +13561,7 @@
                 </a:solidFill>
                 <a:latin typeface="Microsoft YaHei"/>
               </a:rPr>
-              <a:t>RFC #2519 在 pickForDispatch 出队末端检测超时并被动丢弃。</a:t>
+              <a:t>原生仅支持通用 RDMA/TCP，数据经 Host DDR 中转，无法实现 HBM-SSD 直达。</a:t>
             </a:r>
           </a:p>
           <a:p>
@@ -13553,7 +13580,7 @@
               </a:defRPr>
             </a:pPr>
             <a:r>
-              <a:t>• multi_rail 令牌桶：</a:t>
+              <a:t>• 缺微秒动态 ROI 决策：</a:t>
             </a:r>
             <a:r>
               <a:rPr sz="1150" b="0">
@@ -13562,7 +13589,7 @@
                 </a:solidFill>
                 <a:latin typeface="Microsoft YaHei"/>
               </a:rPr>
-              <a:t>为缓解切片到达倾斜 (Skew) 与 Incast，源码预埋软件令牌桶限速机制。</a:t>
+              <a:t>静态贪婪拉取，在短前缀或网络拥塞时，网络拉取耗时远超本地重算致 TTFT 反噬。</a:t>
             </a:r>
           </a:p>
           <a:p>
@@ -13581,7 +13608,7 @@
               </a:defRPr>
             </a:pPr>
             <a:r>
-              <a:t>• 开销损耗与算力等待：</a:t>
+              <a:t>• 被动补救损耗算力：</a:t>
             </a:r>
             <a:r>
               <a:rPr sz="1150" b="0">
@@ -13590,7 +13617,7 @@
                 </a:solidFill>
                 <a:latin typeface="Microsoft YaHei"/>
               </a:rPr>
-              <a:t>出队末端被动丢弃时，前期已消耗的锁与内存注册开销全部浪费，算力已空等。</a:t>
+              <a:t>admission_queue RFC #2519 在出队末端超时丢弃，前期锁与注册开销完全浪费。</a:t>
             </a:r>
           </a:p>
         </p:txBody>
@@ -13671,7 +13698,7 @@
               </a:defRPr>
             </a:pPr>
             <a:r>
-              <a:t>4. 演进策略与代码留白：企业级功能开源维护局限</a:t>
+              <a:t>4. 安全与协同短板：缺失 6 维语义校验与多卡同步</a:t>
             </a:r>
           </a:p>
           <a:p>
@@ -13690,7 +13717,7 @@
               </a:defRPr>
             </a:pPr>
             <a:r>
-              <a:t>[开源供应链考量与原厂自研底座必要性]</a:t>
+              <a:t>[源码分析：多租户脏数据风险与集合通信死锁隐患]</a:t>
             </a:r>
           </a:p>
           <a:p>
@@ -13709,7 +13736,7 @@
               </a:defRPr>
             </a:pPr>
             <a:r>
-              <a:t>• 演进策略分化：</a:t>
+              <a:t>• 缺 6 维语义校验与租约：</a:t>
             </a:r>
             <a:r>
               <a:rPr sz="1150" b="0">
@@ -13718,7 +13745,7 @@
                 </a:solidFill>
                 <a:latin typeface="Microsoft YaHei"/>
               </a:rPr>
-              <a:t>开源项目通常侧重基础通用能力，企业级深度优化往往走向差异化闭环。</a:t>
+              <a:t>无模型/词表/模板/租约检查，多租户或热更新时极易读取过期脏数据致生成错乱。</a:t>
             </a:r>
           </a:p>
           <a:p>
@@ -13737,7 +13764,7 @@
               </a:defRPr>
             </a:pPr>
             <a:r>
-              <a:t>• 核心 HA 模块留白：</a:t>
+              <a:t>• 缺 TP=8 多卡状态同步：</a:t>
             </a:r>
             <a:r>
               <a:rPr sz="1150" b="0">
@@ -13746,7 +13773,7 @@
                 </a:solidFill>
                 <a:latin typeface="Microsoft YaHei"/>
               </a:rPr>
-              <a:t>mooncake-store 大规模 HA（高可用）与多租户配额在主干中多保留为 Stub 空桩。</a:t>
+              <a:t>各卡独立拉取，单卡未命中极易诱发 NCCL/HCCL 集合通信死锁挂起。</a:t>
             </a:r>
           </a:p>
           <a:p>
@@ -13765,7 +13792,7 @@
               </a:defRPr>
             </a:pPr>
             <a:r>
-              <a:t>• 原厂深度适配必然性：</a:t>
+              <a:t>• 企业级 HA 模块留白：</a:t>
             </a:r>
             <a:r>
               <a:rPr sz="1150" b="0">
@@ -13774,7 +13801,7 @@
                 </a:solidFill>
                 <a:latin typeface="Microsoft YaHei"/>
               </a:rPr>
-              <a:t>通用开源无法保证对特定国产 NPU 微架构与驱动版本的持续深度优化与 SLA 兜底。</a:t>
+              <a:t>mooncake-store 大规模 HA 与多租户配额在开源主干中多保留为 Stub 空桩。</a:t>
             </a:r>
           </a:p>
         </p:txBody>
@@ -13910,7 +13937,7 @@
                 </a:solidFill>
                 <a:latin typeface="Microsoft YaHei"/>
               </a:rPr>
-              <a:t>开源落地局限：</a:t>
+              <a:t>重构增强必然性：</a:t>
             </a:r>
             <a:r>
               <a:rPr sz="1150" b="0">
@@ -13919,7 +13946,7 @@
                 </a:solidFill>
                 <a:latin typeface="Microsoft YaHei"/>
               </a:rPr>
-              <a:t>源码分析与社区实测表明，通用开源方案的无语义切片和被动丢弃机制 </a:t>
+              <a:t>源码分析与社区实测表明，通用开源方案存在 5 大结构性缺陷；本项目将原有需求 100% 转化为针对 Mooncake 的 </a:t>
             </a:r>
             <a:r>
               <a:rPr sz="1150" b="1">
@@ -13928,7 +13955,7 @@
                 </a:solidFill>
                 <a:latin typeface="Microsoft YaHei"/>
               </a:rPr>
-              <a:t>无法根除网络 Incast 拥塞与尾延迟劣化</a:t>
+              <a:t>5 大关键技术增强工程包（连续块描述符、UBMEM/URMA底座、动态ROI、6维校验、多卡同步）</a:t>
             </a:r>
             <a:r>
               <a:rPr sz="1150" b="0">
@@ -13937,25 +13964,7 @@
                 </a:solidFill>
                 <a:latin typeface="Microsoft YaHei"/>
               </a:rPr>
-              <a:t>；必须通过自研系统将 </a:t>
-            </a:r>
-            <a:r>
-              <a:rPr sz="1150" b="1">
-                <a:solidFill>
-                  <a:srgbClr val="DC2626"/>
-                </a:solidFill>
-                <a:latin typeface="Microsoft YaHei"/>
-              </a:rPr>
-              <a:t>模型计算时序、网络 QoS（服务质量）与芯片通信原语深度结合</a:t>
-            </a:r>
-            <a:r>
-              <a:rPr sz="1150" b="0">
-                <a:solidFill>
-                  <a:srgbClr val="0F172A"/>
-                </a:solidFill>
-                <a:latin typeface="Microsoft YaHei"/>
-              </a:rPr>
-              <a:t>，才能满足严苛生产 SLA（服务等级协议）要求。</a:t>
+              <a:t>，完成从通用组件到原厂高性能底座的彻底升维。</a:t>
             </a:r>
           </a:p>
         </p:txBody>
@@ -14009,7 +14018,7 @@
           <a:lstStyle/>
           <a:p>
             <a:pPr>
-              <a:defRPr sz="1900" b="1">
+              <a:defRPr sz="1800" b="1">
                 <a:solidFill>
                   <a:srgbClr val="1E3A8A"/>
                 </a:solidFill>
@@ -14017,7 +14026,7 @@
               </a:defRPr>
             </a:pPr>
             <a:r>
-              <a:t>针对开源不足的方案优势 (1/2)：从通用传输组件到语义化统一异构内存池</a:t>
+              <a:t>针对开源不足的方案优势 (1/2)：基于 Mooncake 底座注入原厂 5 大关键技术增强包</a:t>
             </a:r>
           </a:p>
           <a:p>
@@ -14150,7 +14159,7 @@
               </a:defRPr>
             </a:pPr>
             <a:r>
-              <a:t>支柱一：拓扑亲和映射</a:t>
+              <a:t>增强一：连续块描述符编译</a:t>
             </a:r>
           </a:p>
           <a:p>
@@ -14188,7 +14197,7 @@
               </a:defRPr>
             </a:pPr>
             <a:r>
-              <a:t>• 语义与拓扑绑定：</a:t>
+              <a:t>• Extent 连续块描述符：</a:t>
             </a:r>
             <a:r>
               <a:rPr sz="1150" b="0">
@@ -14197,7 +14206,7 @@
                 </a:solidFill>
                 <a:latin typeface="Microsoft YaHei"/>
               </a:rPr>
-              <a:t>通过 KVSemanticIdentity 绑定 Model / Layer / TP Rank（张量并行卡号）。</a:t>
+              <a:t>用 64B POD 描述符贪心合并离散 Block，Layer 0 优先传输消除流水等待。</a:t>
             </a:r>
           </a:p>
           <a:p>
@@ -14225,7 +14234,7 @@
                 </a:solidFill>
                 <a:latin typeface="Microsoft YaHei"/>
               </a:rPr>
-              <a:t>片间走 HCCS 环路，机架内走 URMA 直连，存储走 PCIe DMA（直接内存访问）。</a:t>
+              <a:t>片间走 HCCS 环路，机架内走 URMA 直连，存储走 PCIe DMA。</a:t>
             </a:r>
           </a:p>
           <a:p>
@@ -14253,7 +14262,7 @@
                 </a:solidFill>
                 <a:latin typeface="Microsoft YaHei"/>
               </a:rPr>
-              <a:t>同 Prompt / Layer 局域汇聚，从源头消除 N-to-1 Incast 拥塞。</a:t>
+              <a:t>同 Prompt / Layer 局域汇聚，描述符压缩率 ≥50%，彻底消除 Incast 拥塞。</a:t>
             </a:r>
           </a:p>
         </p:txBody>
@@ -14334,7 +14343,7 @@
               </a:defRPr>
             </a:pPr>
             <a:r>
-              <a:t>支柱二：Host 零数据拷贝</a:t>
+              <a:t>增强二：Host CPU 零数据拷贝</a:t>
             </a:r>
           </a:p>
           <a:p>
@@ -14381,7 +14390,7 @@
                 </a:solidFill>
                 <a:latin typeface="Microsoft YaHei"/>
               </a:rPr>
-              <a:t>控制面仅下发指令，正文数据 100% 绕过 Host CPU 与内存，消除内存拷贝开销。</a:t>
+              <a:t>CPU 仅负责下发控制指令，正文数据 100% 硬件直达，Host Payload 严格为 0。</a:t>
             </a:r>
           </a:p>
           <a:p>
@@ -14409,7 +14418,7 @@
                 </a:solidFill>
                 <a:latin typeface="Microsoft YaHei"/>
               </a:rPr>
-              <a:t>通过 Direct PCIe DMA 实现 NPU HBM（显存）与 SSD 线速搬运。</a:t>
+              <a:t>通过 Direct PCIe DMA 实现 NPU HBM 与 NVMe SSD 线速直达。</a:t>
             </a:r>
           </a:p>
           <a:p>
@@ -14518,7 +14527,7 @@
               </a:defRPr>
             </a:pPr>
             <a:r>
-              <a:t>支柱三：UBMEM 总线直通</a:t>
+              <a:t>增强三：UBMEM 总线直通</a:t>
             </a:r>
           </a:p>
           <a:p>
@@ -14537,7 +14546,7 @@
               </a:defRPr>
             </a:pPr>
             <a:r>
-              <a:t>控制面元数据时延 &lt; 5 µs</a:t>
+              <a:t>控制面元数据时延微秒级响应</a:t>
             </a:r>
           </a:p>
           <a:p>
@@ -14612,7 +14621,7 @@
               </a:defRPr>
             </a:pPr>
             <a:r>
-              <a:t>• 时延压降 20 倍：</a:t>
+              <a:t>• 控制面时延显著降低：</a:t>
             </a:r>
             <a:r>
               <a:rPr sz="1150" b="0">
@@ -14621,7 +14630,7 @@
                 </a:solidFill>
                 <a:latin typeface="Microsoft YaHei"/>
               </a:rPr>
-              <a:t>控制面时延从 50 ~ 100 µs 压降至 &lt; 5 µs，为数据传输争取宝贵时延预算。</a:t>
+              <a:t>控制面时延从 50 ~ 100 µs 降至微秒级至数十微秒，为数据传输争取宝贵时延预算。</a:t>
             </a:r>
           </a:p>
         </p:txBody>
@@ -14702,7 +14711,7 @@
               </a:defRPr>
             </a:pPr>
             <a:r>
-              <a:t>支柱四：多介质统一分层</a:t>
+              <a:t>增强四：多介质统一分层</a:t>
             </a:r>
           </a:p>
           <a:p>
@@ -14749,7 +14758,7 @@
                 </a:solidFill>
                 <a:latin typeface="Microsoft YaHei"/>
               </a:rPr>
-              <a:t>将 HBM ↔ SSD 直达确立为主要扩展路径，DDR（内存）退居辅助缓冲。</a:t>
+              <a:t>将 HBM ↔ SSD 直达确立为主要扩展路径，DDR 退居辅助缓冲。</a:t>
             </a:r>
           </a:p>
           <a:p>
@@ -14886,7 +14895,7 @@
               </a:defRPr>
             </a:pPr>
             <a:r>
-              <a:t>【统一异构 KVCache 存储池全栈分层协作拓扑】</a:t>
+              <a:t>【统一异构 KVCache 存储池全栈分层协作拓扑 (Mooncake 底座 + 原厂 5 大增强包)】</a:t>
             </a:r>
           </a:p>
         </p:txBody>
@@ -14967,7 +14976,7 @@
               </a:defRPr>
             </a:pPr>
             <a:r>
-              <a:t>L1. 框架意图接入层</a:t>
+              <a:t>L1. 开源意图接入层</a:t>
             </a:r>
           </a:p>
           <a:p>
@@ -14983,7 +14992,7 @@
               </a:defRPr>
             </a:pPr>
             <a:r>
-              <a:t>vLLM / SGLang 统一接口</a:t>
+              <a:t>Mooncake Connector 统一适配</a:t>
             </a:r>
           </a:p>
           <a:p>
@@ -14999,7 +15008,7 @@
               </a:defRPr>
             </a:pPr>
             <a:r>
-              <a:t>前缀复用与重算收益请求</a:t>
+              <a:t>兼容 vLLM/SGLang 前缀复用请求</a:t>
             </a:r>
           </a:p>
         </p:txBody>
@@ -15080,7 +15089,7 @@
               </a:defRPr>
             </a:pPr>
             <a:r>
-              <a:t>L2. KV 语义治理层</a:t>
+              <a:t>L2. 语义与安全校验层</a:t>
             </a:r>
           </a:p>
           <a:p>
@@ -15096,7 +15105,7 @@
               </a:defRPr>
             </a:pPr>
             <a:r>
-              <a:t>KVSemantic 语义目录</a:t>
+              <a:t>6 维语义一致性校验</a:t>
             </a:r>
           </a:p>
           <a:p>
@@ -15112,7 +15121,7 @@
               </a:defRPr>
             </a:pPr>
             <a:r>
-              <a:t>多租户隔离与 Lease 租约</a:t>
+              <a:t>视图租约安全与多租户隔离</a:t>
             </a:r>
           </a:p>
         </p:txBody>
@@ -15193,7 +15202,7 @@
               </a:defRPr>
             </a:pPr>
             <a:r>
-              <a:t>L3. 决策与编译层</a:t>
+              <a:t>L3. 动态决策与编译层</a:t>
             </a:r>
           </a:p>
           <a:p>
@@ -15209,7 +15218,7 @@
               </a:defRPr>
             </a:pPr>
             <a:r>
-              <a:t>动态选路与成本评估引擎</a:t>
+              <a:t>QueryPlan 决策 + 描述符编译</a:t>
             </a:r>
           </a:p>
           <a:p>
@@ -15225,7 +15234,7 @@
               </a:defRPr>
             </a:pPr>
             <a:r>
-              <a:t>异步流水与描述符批量编译</a:t>
+              <a:t>微秒 ROI 评估与异步 Stream 流水</a:t>
             </a:r>
           </a:p>
         </p:txBody>
@@ -15306,7 +15315,7 @@
               </a:defRPr>
             </a:pPr>
             <a:r>
-              <a:t>L4. 硬件极速执行层</a:t>
+              <a:t>L4. 硬件极速执行底座</a:t>
             </a:r>
           </a:p>
           <a:p>
@@ -15322,7 +15331,7 @@
               </a:defRPr>
             </a:pPr>
             <a:r>
-              <a:t>UBMEM / URMA 直达</a:t>
+              <a:t>UBMEM + URMA + SSD Direct</a:t>
             </a:r>
           </a:p>
           <a:p>
@@ -15338,7 +15347,7 @@
               </a:defRPr>
             </a:pPr>
             <a:r>
-              <a:t>微秒总线与 Host 零拷贝</a:t>
+              <a:t>Host CPU 零数据拷贝与硬件直达</a:t>
             </a:r>
           </a:p>
         </p:txBody>
@@ -15483,7 +15492,7 @@
                 </a:solidFill>
                 <a:latin typeface="Microsoft YaHei"/>
               </a:rPr>
-              <a:t>通过构建具备模型语义感知的统一异构存储池，以 </a:t>
+              <a:t>在 Mooncake 开源底座之上，全面注入原厂 </a:t>
             </a:r>
             <a:r>
               <a:rPr sz="1150" b="1">
@@ -15492,7 +15501,7 @@
                 </a:solidFill>
                 <a:latin typeface="Microsoft YaHei"/>
               </a:rPr>
-              <a:t>拓扑亲和传输消除网络拥塞、Host CPU 零数据拷贝打破计算瓶颈、UBMEM 总线直达压缩控制面开销</a:t>
+              <a:t>连续块描述符编译、Host CPU 零数据拷贝、UBMEM 总线直通与 HBM-SSD 直达分层</a:t>
             </a:r>
             <a:r>
               <a:rPr sz="1150" b="0">
@@ -15501,7 +15510,7 @@
                 </a:solidFill>
                 <a:latin typeface="Microsoft YaHei"/>
               </a:rPr>
-              <a:t>，全面释放国产芯片的硬件互联与多级存储潜能。</a:t>
+              <a:t>四大支柱，彻底打破开源软件性能天花板，释放国产硬件极致算力。</a:t>
             </a:r>
           </a:p>
         </p:txBody>
@@ -15555,7 +15564,7 @@
           <a:lstStyle/>
           <a:p>
             <a:pPr>
-              <a:defRPr sz="1900" b="1">
+              <a:defRPr sz="1800" b="1">
                 <a:solidFill>
                   <a:srgbClr val="1E3A8A"/>
                 </a:solidFill>
@@ -15563,7 +15572,7 @@
               </a:defRPr>
             </a:pPr>
             <a:r>
-              <a:t>针对开源不足的方案优势 (2/2)：前置动态收益决策与数据访问安全屏障</a:t>
+              <a:t>针对开源不足的方案优势 (2/2)：描述符编译流水、动态选路与安全守卫时序</a:t>
             </a:r>
           </a:p>
           <a:p>
@@ -15579,7 +15588,7 @@
               </a:defRPr>
             </a:pPr>
             <a:r>
-              <a:t>避免盲目拉取与性能回退，保障多租户隔离与 0 错误消费</a:t>
+              <a:t>利用异构描述符编译器消除网络冲突，通过双 Stream 物理流水掩盖传输时延并构筑安全屏障</a:t>
             </a:r>
           </a:p>
         </p:txBody>
@@ -15715,7 +15724,7 @@
               </a:defRPr>
             </a:pPr>
             <a:r>
-              <a:t>基于实时网络与算力开销的动态选路</a:t>
+              <a:t>QueryPlan 微秒级选路与成本预估</a:t>
             </a:r>
           </a:p>
           <a:p>
@@ -15734,7 +15743,7 @@
               </a:defRPr>
             </a:pPr>
             <a:r>
-              <a:t>★ 收益判定逻辑：</a:t>
+              <a:t>★ 收益判定数学模型：</a:t>
             </a:r>
             <a:r>
               <a:rPr sz="1150" b="0">
@@ -15743,7 +15752,7 @@
                 </a:solidFill>
                 <a:latin typeface="Microsoft YaHei"/>
               </a:rPr>
-              <a:t>拉取与加载总开销 &lt; 本地直接重算耗时（仅在获取明确净加速收益时执行加载，否则主动回退至本地重算）。</a:t>
+              <a:t>拉取与加载总开销 T_load &lt; 本地直接重算耗时 T_prefill（仅在获取明确净加速收益时执行加载，否则主动回退）。</a:t>
             </a:r>
           </a:p>
           <a:p>
@@ -15762,7 +15771,7 @@
               </a:defRPr>
             </a:pPr>
             <a:r>
-              <a:t>★ 前置决策优势：</a:t>
+              <a:t>★ 前置决策彻底闭环：</a:t>
             </a:r>
             <a:r>
               <a:rPr sz="1150" b="0">
@@ -15771,7 +15780,7 @@
                 </a:solidFill>
                 <a:latin typeface="Microsoft YaHei"/>
               </a:rPr>
-              <a:t>查表阶段即完成成本评估。若网络拥塞慢于重算，主动返回重算决策，零硬件描述符申请、零队列浪费、NPU 零空转。</a:t>
+              <a:t>查表阶段即完成成本评估（开销控制在微秒级）。若网络拥塞，主动返回重算决策，零描述符申请、NPU 零空转。</a:t>
             </a:r>
           </a:p>
           <a:p>
@@ -15790,7 +15799,7 @@
               </a:defRPr>
             </a:pPr>
             <a:r>
-              <a:t>★ 对比被动丢弃：</a:t>
+              <a:t>★ 对比开源被动丢弃：</a:t>
             </a:r>
             <a:r>
               <a:rPr sz="1150" b="0">
@@ -15927,7 +15936,7 @@
                 </a:solidFill>
                 <a:latin typeface="Microsoft YaHei"/>
               </a:rPr>
-              <a:t>NPU AICore 执行第 L 层 GEMM（矩阵计算），URMA DMA 在后台异步预取第 L+1 层 KV，运行在独立硬件 Stream。</a:t>
+              <a:t>NPU 内部 AICore 执行第 L 层 GEMM（矩阵计算），URMA DMA 在后台异步预取第 L+1 层 KV，运行在独立硬件 Stream。</a:t>
             </a:r>
           </a:p>
           <a:p>
@@ -15983,7 +15992,7 @@
                 </a:solidFill>
                 <a:latin typeface="Microsoft YaHei"/>
               </a:rPr>
-              <a:t>全模型 32 层流水全掩盖，跨节点网络传输耗时完全隐藏在矩阵计算耗时包络内！</a:t>
+              <a:t>全模型 32 层流水全掩盖，跨节点网络传输耗时完全隐藏在矩阵计算耗时区间内！</a:t>
             </a:r>
           </a:p>
         </p:txBody>
@@ -16064,7 +16073,7 @@
               </a:defRPr>
             </a:pPr>
             <a:r>
-              <a:t>优势三：数据访问安全与多卡同步</a:t>
+              <a:t>优势三：视图租约守卫与多卡同步</a:t>
             </a:r>
           </a:p>
           <a:p>
@@ -16083,7 +16092,7 @@
               </a:defRPr>
             </a:pPr>
             <a:r>
-              <a:t>严格语义权限校验与租约机制</a:t>
+              <a:t>6 维语义校验与张量并行原子保序</a:t>
             </a:r>
           </a:p>
           <a:p>
@@ -16102,7 +16111,7 @@
               </a:defRPr>
             </a:pPr>
             <a:r>
-              <a:t>★ 租户安全隔离：</a:t>
+              <a:t>★ 6 维语义一致性校验：</a:t>
             </a:r>
             <a:r>
               <a:rPr sz="1150" b="0">
@@ -16111,7 +16120,7 @@
                 </a:solidFill>
                 <a:latin typeface="Microsoft YaHei"/>
               </a:rPr>
-              <a:t>引入显式访问凭证与语义身份，严格校验租户权限与内存视图，杜绝越权读取。</a:t>
+              <a:t>对模型、词表、模板、LoRA、就绪位与租约进行 6 维微秒级合法性检查，错误消费精确为 0。</a:t>
             </a:r>
           </a:p>
           <a:p>
@@ -16130,7 +16139,7 @@
               </a:defRPr>
             </a:pPr>
             <a:r>
-              <a:t>★ 一致性与租约校验：</a:t>
+              <a:t>★ 视图租约安全守卫：</a:t>
             </a:r>
             <a:r>
               <a:rPr sz="1150" b="0">
@@ -16139,7 +16148,7 @@
                 </a:solidFill>
                 <a:latin typeface="Microsoft YaHei"/>
               </a:rPr>
-              <a:t>在消费前严格校验模型架构、词表、提示词模板及租约有效性，杜绝未写完、已过期或失效的缓存数据被错误读取。</a:t>
+              <a:t>安全捕获远端超时或异常中断并快速回滚至本地重算，彻底阻断跨节点故障扩散。</a:t>
             </a:r>
           </a:p>
           <a:p>
@@ -16158,7 +16167,7 @@
               </a:defRPr>
             </a:pPr>
             <a:r>
-              <a:t>★ 多卡原子保序：</a:t>
+              <a:t>★ 多卡状态同步：</a:t>
             </a:r>
             <a:r>
               <a:rPr sz="1150" b="0">
@@ -16167,7 +16176,7 @@
                 </a:solidFill>
                 <a:latin typeface="Microsoft YaHei"/>
               </a:rPr>
-              <a:t>支持张量并行多卡原子并发选路，消除跨卡到达时间差导致的集合通信死等。</a:t>
+              <a:t>张量并行 (TP=8) 多卡状态同步保持微秒级响应，杜绝跨卡到达时间差导致的集合通信死锁。</a:t>
             </a:r>
           </a:p>
         </p:txBody>
@@ -16329,7 +16338,7 @@
               </a:defRPr>
             </a:pPr>
             <a:r>
-              <a:t>Stream 1 (AICore 算力): [ Layer L GEMM 矩阵计算耗时包络 ]</a:t>
+              <a:t>Stream 1 (AICore 算力): [ Layer L GEMM 矩阵计算耗时区间 ]</a:t>
             </a:r>
           </a:p>
           <a:p>
@@ -16426,7 +16435,7 @@
               </a:defRPr>
             </a:pPr>
             <a:r>
-              <a:t>数据安全校验: [ 语义与权限严格校验 ] ➔ [ 就绪状态检查 ]</a:t>
+              <a:t>数据安全校验: [ 6 维语义合法性检查 ] ➔ [ 视图租约安全守护 ]</a:t>
             </a:r>
           </a:p>
           <a:p>
@@ -16442,7 +16451,7 @@
               </a:defRPr>
             </a:pPr>
             <a:r>
-              <a:t>租约生命周期: [ 显式租约安全防护 ] ➔ 杜绝脏数据，错误消费为 0</a:t>
+              <a:t>张量并行协同: [ 多卡状态同步微秒级响应 ] ➔ 0 死锁，0 错误消费</a:t>
             </a:r>
           </a:p>
         </p:txBody>
@@ -16587,7 +16596,7 @@
                 </a:solidFill>
                 <a:latin typeface="Microsoft YaHei"/>
               </a:rPr>
-              <a:t>相比开源方案的盲目拉取与事后被动丢弃，本项目通过 </a:t>
+              <a:t>相比 Mooncake 的盲目拉取与事后被动丢弃，本项目通过 </a:t>
             </a:r>
             <a:r>
               <a:rPr sz="1150" b="1">
@@ -16596,7 +16605,7 @@
                 </a:solidFill>
                 <a:latin typeface="Microsoft YaHei"/>
               </a:rPr>
-              <a:t>前置量化决策确保每次加载均获正向收益</a:t>
+              <a:t>QueryPlan 前置动态量化决策确保每次加载获明确净收益</a:t>
             </a:r>
             <a:r>
               <a:rPr sz="1150" b="0">
@@ -16632,7 +16641,7 @@
                 </a:solidFill>
                 <a:latin typeface="Microsoft YaHei"/>
               </a:rPr>
-              <a:t>严格的语义校验与租约机制实现 0 错误消费与多卡安全协同</a:t>
+              <a:t>6 维语义校验与多卡状态同步实现 0 错误消费与 0 集合通信死锁</a:t>
             </a:r>
             <a:r>
               <a:rPr sz="1150" b="0">
@@ -16695,7 +16704,7 @@
           <a:lstStyle/>
           <a:p>
             <a:pPr>
-              <a:defRPr sz="1900" b="1">
+              <a:defRPr sz="1800" b="1">
                 <a:solidFill>
                   <a:srgbClr val="1E3A8A"/>
                 </a:solidFill>
@@ -16911,7 +16920,7 @@
                 </a:solidFill>
                 <a:latin typeface="Microsoft YaHei"/>
               </a:rPr>
-              <a:t>通过 KVSemanticIdentity 将 Layer 与 TP Rank 精准映射至直连硬件物理队列。</a:t>
+              <a:t>通过多维度语义标识将 Layer 与 TP Rank 精准映射至直连硬件物理队列。</a:t>
             </a:r>
           </a:p>
           <a:p>
@@ -17123,7 +17132,7 @@
                 </a:solidFill>
                 <a:latin typeface="Microsoft YaHei"/>
               </a:rPr>
-              <a:t>全模型 32 层流水全掩盖，把网络时延完全压缩进算力耗时包络！</a:t>
+              <a:t>全模型 32 层流水全掩盖，把网络传输时延完全压缩进算力计算耗时窗口！</a:t>
             </a:r>
           </a:p>
         </p:txBody>
@@ -17204,7 +17213,7 @@
               </a:defRPr>
             </a:pPr>
             <a:r>
-              <a:t>协同技术三：硬件 QoS 队列与零数据拷贝</a:t>
+              <a:t>协同技术三：硬件 QoS 队列与 Host 零拷贝</a:t>
             </a:r>
           </a:p>
           <a:p>
@@ -17223,7 +17232,7 @@
               </a:defRPr>
             </a:pPr>
             <a:r>
-              <a:t>[网卡 QoS 队列 ➔ Host 零拷贝协同]</a:t>
+              <a:t>[网卡 QoS 队列 ➔ Host 零数据拷贝协同]</a:t>
             </a:r>
           </a:p>
           <a:p>
@@ -17270,7 +17279,7 @@
               </a:defRPr>
             </a:pPr>
             <a:r>
-              <a:t>• CPU 不参与数据搬运：</a:t>
+              <a:t>• Host CPU 零数据拷贝：</a:t>
             </a:r>
             <a:r>
               <a:rPr sz="1150" b="0">
@@ -17279,7 +17288,7 @@
                 </a:solidFill>
                 <a:latin typeface="Microsoft YaHei"/>
               </a:rPr>
-              <a:t>控制面下发描述符后，数据搬运 100% 硬件 DMA 执行，消除 CPU 内存拷贝。</a:t>
+              <a:t>CPU 仅负责下发控制指令，数据搬运 100% 硬件直达，Payload 严格为 0。</a:t>
             </a:r>
           </a:p>
           <a:p>
@@ -17307,7 +17316,7 @@
                 </a:solidFill>
                 <a:latin typeface="Microsoft YaHei"/>
               </a:rPr>
-              <a:t>后台进行大规模 SSD 迁移时，前台实时 Decode（解码生成）的 TPOT 抖动严格 &lt; 3%。</a:t>
+              <a:t>后台进行大规模 SSD 迁移时，前台在线推理 TPOT 抖动严格 &lt; 3%。</a:t>
             </a:r>
           </a:p>
         </p:txBody>
@@ -17482,7 +17491,7 @@
               </a:defRPr>
             </a:pPr>
             <a:r>
-              <a:t>• 时延压缩至 &lt; 5 µs：</a:t>
+              <a:t>• 微秒级极速响应：</a:t>
             </a:r>
             <a:r>
               <a:rPr sz="1150" b="0">
@@ -17491,7 +17500,7 @@
                 </a:solidFill>
                 <a:latin typeface="Microsoft YaHei"/>
               </a:rPr>
-              <a:t>控制面时延从上百微秒压缩至 5 µs 内，微秒级驱动 URMA 正文搬运。</a:t>
+              <a:t>控制面时延压缩至微秒级到几十微秒，极速驱动 URMA 正文搬运。</a:t>
             </a:r>
           </a:p>
         </p:txBody>
@@ -17708,7 +17717,7 @@
           <a:lstStyle/>
           <a:p>
             <a:pPr>
-              <a:defRPr sz="1900" b="1">
+              <a:defRPr sz="1800" b="1">
                 <a:solidFill>
                   <a:srgbClr val="1E3A8A"/>
                 </a:solidFill>
@@ -17826,8 +17835,8 @@
         </p:nvSpPr>
         <p:spPr>
           <a:xfrm>
-            <a:off x="640080" y="1133856"/>
-            <a:ext cx="6099048" cy="2487168"/>
+            <a:off x="685800" y="1133856"/>
+            <a:ext cx="5989320" cy="2556000"/>
           </a:xfrm>
           <a:prstGeom prst="rect">
             <a:avLst/>
@@ -17849,7 +17858,7 @@
               </a:defRPr>
             </a:pPr>
             <a:r>
-              <a:t>1. 端到端 TTFT 数学建模与 c 的 4 级条件漏斗推导 (1K Token)</a:t>
+              <a:t>1. 端到端 TTFT 数学建模与正价值消费率 c 漏斗推导 (1K Token)</a:t>
             </a:r>
           </a:p>
           <a:p>
@@ -17871,7 +17880,7 @@
           <a:p>
             <a:pPr>
               <a:spcBef>
-                <a:spcPts val="200"/>
+                <a:spcPts val="100"/>
               </a:spcBef>
               <a:defRPr sz="950" b="1">
                 <a:solidFill>
@@ -17881,102 +17890,207 @@
               </a:defRPr>
             </a:pPr>
             <a:r>
-              <a:t>【正价值消费率 c 计算方法】 c = r × u = r × (u1 × u2 × u3 × u4)  [4 级条件漏斗连乘]</a:t>
+              <a:t>【正价值消费率】 c = r × u = r × (u1 × u2 × u3 × u4)  [4 级条件漏斗逐级连乘]</a:t>
+            </a:r>
+          </a:p>
+          <a:p>
+            <a:pPr>
+              <a:spcBef>
+                <a:spcPts val="300"/>
+              </a:spcBef>
+              <a:defRPr sz="1000" b="1">
+                <a:solidFill>
+                  <a:srgbClr val="1E3A8A"/>
+                </a:solidFill>
+                <a:latin typeface="Microsoft YaHei"/>
+              </a:defRPr>
+            </a:pPr>
+            <a:r>
+              <a:t>▶ u1 候选发现与语义保持 </a:t>
+            </a:r>
+            <a:r>
+              <a:rPr sz="950" b="1">
+                <a:solidFill>
+                  <a:srgbClr val="1D4ED8"/>
+                </a:solidFill>
+                <a:latin typeface="Microsoft YaHei"/>
+              </a:rPr>
+              <a:t>(开源 90% ➔ 本项目 97%)</a:t>
             </a:r>
           </a:p>
           <a:p>
             <a:pPr>
               <a:lnSpc>
-                <a:spcPct val="116000"/>
+                <a:spcPct val="115000"/>
               </a:lnSpc>
               <a:spcBef>
-                <a:spcPts val="200"/>
+                <a:spcPts val="100"/>
               </a:spcBef>
-              <a:defRPr sz="950" b="1">
-                <a:solidFill>
-                  <a:srgbClr val="0F172A"/>
-                </a:solidFill>
-                <a:latin typeface="Microsoft YaHei"/>
-              </a:defRPr>
-            </a:pPr>
-            <a:r>
-              <a:t>• u1 语义与候选保持 (90%➔97%)：</a:t>
-            </a:r>
-            <a:r>
-              <a:rPr sz="919" b="0">
+              <a:defRPr sz="919" b="0">
                 <a:solidFill>
                   <a:srgbClr val="475569"/>
                 </a:solidFill>
                 <a:latin typeface="Microsoft YaHei"/>
+              </a:defRPr>
+            </a:pPr>
+            <a:r>
+              <a:t>   • 统一语义标识 · 缓存感知智能路由 · 全局生命周期治理</a:t>
+            </a:r>
+          </a:p>
+          <a:p>
+            <a:pPr>
+              <a:spcBef>
+                <a:spcPts val="300"/>
+              </a:spcBef>
+              <a:defRPr sz="1000" b="1">
+                <a:solidFill>
+                  <a:srgbClr val="1E3A8A"/>
+                </a:solidFill>
+                <a:latin typeface="Microsoft YaHei"/>
+              </a:defRPr>
+            </a:pPr>
+            <a:r>
+              <a:t>▶ u2 资格校验与租约通过 </a:t>
+            </a:r>
+            <a:r>
+              <a:rPr sz="950" b="1">
+                <a:solidFill>
+                  <a:srgbClr val="1D4ED8"/>
+                </a:solidFill>
+                <a:latin typeface="Microsoft YaHei"/>
               </a:rPr>
-              <a:t>统一语义身份 + 缓存感知路由 + 全局生命周期治理</a:t>
+              <a:t>(开源 95% ➔ 本项目 99%)</a:t>
             </a:r>
           </a:p>
           <a:p>
             <a:pPr>
               <a:lnSpc>
-                <a:spcPct val="116000"/>
+                <a:spcPct val="115000"/>
               </a:lnSpc>
               <a:spcBef>
-                <a:spcPts val="200"/>
+                <a:spcPts val="100"/>
               </a:spcBef>
-              <a:defRPr sz="950" b="1">
-                <a:solidFill>
-                  <a:srgbClr val="0F172A"/>
-                </a:solidFill>
-                <a:latin typeface="Microsoft YaHei"/>
-              </a:defRPr>
-            </a:pPr>
-            <a:r>
-              <a:t>• u2 资格与租约通过 (95%➔99%)：</a:t>
-            </a:r>
-            <a:r>
-              <a:rPr sz="919" b="0">
+              <a:defRPr sz="919" b="0">
                 <a:solidFill>
                   <a:srgbClr val="475569"/>
                 </a:solidFill>
                 <a:latin typeface="Microsoft YaHei"/>
+              </a:defRPr>
+            </a:pPr>
+            <a:r>
+              <a:t>   • 总线元数据快路径 · 显式租约安全隔离 · 多卡状态同步协同</a:t>
+            </a:r>
+          </a:p>
+          <a:p>
+            <a:pPr>
+              <a:spcBef>
+                <a:spcPts val="300"/>
+              </a:spcBef>
+              <a:defRPr sz="1000" b="1">
+                <a:solidFill>
+                  <a:srgbClr val="1E3A8A"/>
+                </a:solidFill>
+                <a:latin typeface="Microsoft YaHei"/>
+              </a:defRPr>
+            </a:pPr>
+            <a:r>
+              <a:t>▶ u3 物理路径直达成功 </a:t>
+            </a:r>
+            <a:r>
+              <a:rPr sz="950" b="1">
+                <a:solidFill>
+                  <a:srgbClr val="1D4ED8"/>
+                </a:solidFill>
+                <a:latin typeface="Microsoft YaHei"/>
               </a:rPr>
-              <a:t>共享内存元数据快路径 + 显式租约机制 + 多卡状态同步</a:t>
+              <a:t>(开源 95% ➔ 本项目 99%)</a:t>
             </a:r>
           </a:p>
           <a:p>
             <a:pPr>
               <a:lnSpc>
-                <a:spcPct val="116000"/>
+                <a:spcPct val="115000"/>
               </a:lnSpc>
               <a:spcBef>
-                <a:spcPts val="200"/>
+                <a:spcPts val="100"/>
               </a:spcBef>
-              <a:defRPr sz="950" b="1">
-                <a:solidFill>
-                  <a:srgbClr val="0F172A"/>
-                </a:solidFill>
-                <a:latin typeface="Microsoft YaHei"/>
-              </a:defRPr>
-            </a:pPr>
-            <a:r>
-              <a:t>• u3 实际路径成功 (95%➔99%)：</a:t>
-            </a:r>
-            <a:r>
-              <a:rPr sz="919" b="0">
+              <a:defRPr sz="919" b="0">
                 <a:solidFill>
                   <a:srgbClr val="475569"/>
                 </a:solidFill>
                 <a:latin typeface="Microsoft YaHei"/>
+              </a:defRPr>
+            </a:pPr>
+            <a:r>
+              <a:t>   • 硬件物理能力矩阵 · 芯片直达传输 DMA · 有界平滑重算回退</a:t>
+            </a:r>
+          </a:p>
+          <a:p>
+            <a:pPr>
+              <a:spcBef>
+                <a:spcPts val="300"/>
+              </a:spcBef>
+              <a:defRPr sz="1000" b="1">
+                <a:solidFill>
+                  <a:srgbClr val="1E3A8A"/>
+                </a:solidFill>
+                <a:latin typeface="Microsoft YaHei"/>
+              </a:defRPr>
+            </a:pPr>
+            <a:r>
+              <a:t>▶ u4 前置动态净收益比 </a:t>
+            </a:r>
+            <a:r>
+              <a:rPr sz="950" b="1">
+                <a:solidFill>
+                  <a:srgbClr val="1D4ED8"/>
+                </a:solidFill>
+                <a:latin typeface="Microsoft YaHei"/>
               </a:rPr>
-              <a:t>硬件能力感知矩阵 + 芯片直达传输 + 有界平滑回退</a:t>
+              <a:t>(开源 98% ➔ 本项目 99%)</a:t>
             </a:r>
           </a:p>
           <a:p>
             <a:pPr>
               <a:lnSpc>
-                <a:spcPct val="116000"/>
+                <a:spcPct val="115000"/>
               </a:lnSpc>
               <a:spcBef>
-                <a:spcPts val="200"/>
+                <a:spcPts val="100"/>
               </a:spcBef>
-              <a:defRPr sz="950" b="1">
+              <a:defRPr sz="919" b="0">
+                <a:solidFill>
+                  <a:srgbClr val="475569"/>
+                </a:solidFill>
+                <a:latin typeface="Microsoft YaHei"/>
+              </a:defRPr>
+            </a:pPr>
+            <a:r>
+              <a:t>   • 微秒选路决策引擎 · 实时队列时延观测 · 自适应负载熔断</a:t>
+            </a:r>
+          </a:p>
+          <a:p>
+            <a:pPr>
+              <a:spcBef>
+                <a:spcPts val="400"/>
+              </a:spcBef>
+              <a:defRPr sz="1000" b="1">
+                <a:solidFill>
+                  <a:srgbClr val="047857"/>
+                </a:solidFill>
+                <a:latin typeface="Microsoft YaHei"/>
+              </a:defRPr>
+            </a:pPr>
+            <a:r>
+              <a:t>★ 综合转化率 u：开源 79.60% ➔ 本项目 94.12% (+14.5%)</a:t>
+            </a:r>
+          </a:p>
+          <a:p>
+            <a:pPr>
+              <a:spcBef>
+                <a:spcPts val="100"/>
+              </a:spcBef>
+              <a:defRPr sz="919" b="0">
                 <a:solidFill>
                   <a:srgbClr val="0F172A"/>
                 </a:solidFill>
@@ -17984,44 +18098,7 @@
               </a:defRPr>
             </a:pPr>
             <a:r>
-              <a:t>• u4 正收益判定比 (98%➔99%)：</a:t>
-            </a:r>
-            <a:r>
-              <a:rPr sz="919" b="0">
-                <a:solidFill>
-                  <a:srgbClr val="475569"/>
-                </a:solidFill>
-                <a:latin typeface="Microsoft YaHei"/>
-              </a:rPr>
-              <a:t>动态决策评估引擎 + 实时队列观测与自适应熔断</a:t>
-            </a:r>
-          </a:p>
-          <a:p>
-            <a:pPr>
-              <a:lnSpc>
-                <a:spcPct val="116000"/>
-              </a:lnSpc>
-              <a:spcBef>
-                <a:spcPts val="200"/>
-              </a:spcBef>
-              <a:defRPr sz="950" b="1">
-                <a:solidFill>
-                  <a:srgbClr val="0F172A"/>
-                </a:solidFill>
-                <a:latin typeface="Microsoft YaHei"/>
-              </a:defRPr>
-            </a:pPr>
-            <a:r>
-              <a:t>• 综合转化率 u 与时延预算：</a:t>
-            </a:r>
-            <a:r>
-              <a:rPr sz="919" b="0">
-                <a:solidFill>
-                  <a:srgbClr val="475569"/>
-                </a:solidFill>
-                <a:latin typeface="Microsoft YaHei"/>
-              </a:rPr>
-              <a:t>u: 开源 79.60% ➔ 本项目 94.12%; T_fixed: 1.6 ➔ 0.575ms; T_load: 10.0 ➔ 4.5ms</a:t>
+              <a:t>   • 开销预算: 固定开销 T_fixed: 1.6 ➔ 0.575ms  |  数据加载 T_load: 10.0 ➔ 4.5ms</a:t>
             </a:r>
           </a:p>
         </p:txBody>
@@ -18035,8 +18112,8 @@
           <p:nvPr/>
         </p:nvGraphicFramePr>
         <p:xfrm>
-          <a:off x="685800" y="3621024"/>
-          <a:ext cx="5989320" cy="2139696"/>
+          <a:off x="685800" y="3799584"/>
+          <a:ext cx="5989320" cy="1691640"/>
         </p:xfrm>
         <a:graphic>
           <a:graphicData uri="http://schemas.openxmlformats.org/drawingml/2006/table">
@@ -18053,7 +18130,7 @@
                 <a:gridCol w="868680"/>
                 <a:gridCol w="822960"/>
               </a:tblGrid>
-              <a:tr h="427939">
+              <a:tr h="338328">
                 <a:tc>
                   <a:txBody>
                     <a:bodyPr wrap="none" lIns="18288" rIns="18288" tIns="36576" bIns="36576"/>
@@ -18072,7 +18149,7 @@
                       </a:r>
                     </a:p>
                   </a:txBody>
-                  <a:tcPr>
+                  <a:tcPr anchor="ctr">
                     <a:solidFill>
                       <a:srgbClr val="1E3A8A"/>
                     </a:solidFill>
@@ -18096,7 +18173,7 @@
                       </a:r>
                     </a:p>
                   </a:txBody>
-                  <a:tcPr>
+                  <a:tcPr anchor="ctr">
                     <a:solidFill>
                       <a:srgbClr val="1E3A8A"/>
                     </a:solidFill>
@@ -18120,7 +18197,7 @@
                       </a:r>
                     </a:p>
                   </a:txBody>
-                  <a:tcPr>
+                  <a:tcPr anchor="ctr">
                     <a:solidFill>
                       <a:srgbClr val="1E3A8A"/>
                     </a:solidFill>
@@ -18144,7 +18221,7 @@
                       </a:r>
                     </a:p>
                   </a:txBody>
-                  <a:tcPr>
+                  <a:tcPr anchor="ctr">
                     <a:solidFill>
                       <a:srgbClr val="1E3A8A"/>
                     </a:solidFill>
@@ -18168,7 +18245,7 @@
                       </a:r>
                     </a:p>
                   </a:txBody>
-                  <a:tcPr>
+                  <a:tcPr anchor="ctr">
                     <a:solidFill>
                       <a:srgbClr val="1E3A8A"/>
                     </a:solidFill>
@@ -18192,7 +18269,7 @@
                       </a:r>
                     </a:p>
                   </a:txBody>
-                  <a:tcPr>
+                  <a:tcPr anchor="ctr">
                     <a:solidFill>
                       <a:srgbClr val="1E3A8A"/>
                     </a:solidFill>
@@ -18216,14 +18293,14 @@
                       </a:r>
                     </a:p>
                   </a:txBody>
-                  <a:tcPr>
+                  <a:tcPr anchor="ctr">
                     <a:solidFill>
                       <a:srgbClr val="1E3A8A"/>
                     </a:solidFill>
                   </a:tcPr>
                 </a:tc>
               </a:tr>
-              <a:tr h="427939">
+              <a:tr h="338328">
                 <a:tc>
                   <a:txBody>
                     <a:bodyPr wrap="square" lIns="18288" rIns="18288" tIns="36576" bIns="36576"/>
@@ -18242,7 +18319,7 @@
                       </a:r>
                     </a:p>
                   </a:txBody>
-                  <a:tcPr>
+                  <a:tcPr anchor="ctr">
                     <a:solidFill>
                       <a:srgbClr val="FFFFFF"/>
                     </a:solidFill>
@@ -18266,7 +18343,7 @@
                       </a:r>
                     </a:p>
                   </a:txBody>
-                  <a:tcPr>
+                  <a:tcPr anchor="ctr">
                     <a:solidFill>
                       <a:srgbClr val="FFFFFF"/>
                     </a:solidFill>
@@ -18290,7 +18367,7 @@
                       </a:r>
                     </a:p>
                   </a:txBody>
-                  <a:tcPr>
+                  <a:tcPr anchor="ctr">
                     <a:solidFill>
                       <a:srgbClr val="FFFFFF"/>
                     </a:solidFill>
@@ -18314,7 +18391,7 @@
                       </a:r>
                     </a:p>
                   </a:txBody>
-                  <a:tcPr>
+                  <a:tcPr anchor="ctr">
                     <a:solidFill>
                       <a:srgbClr val="FFFFFF"/>
                     </a:solidFill>
@@ -18338,7 +18415,7 @@
                       </a:r>
                     </a:p>
                   </a:txBody>
-                  <a:tcPr>
+                  <a:tcPr anchor="ctr">
                     <a:solidFill>
                       <a:srgbClr val="FFFFFF"/>
                     </a:solidFill>
@@ -18362,7 +18439,7 @@
                       </a:r>
                     </a:p>
                   </a:txBody>
-                  <a:tcPr>
+                  <a:tcPr anchor="ctr">
                     <a:solidFill>
                       <a:srgbClr val="FFFFFF"/>
                     </a:solidFill>
@@ -18386,14 +18463,14 @@
                       </a:r>
                     </a:p>
                   </a:txBody>
-                  <a:tcPr>
+                  <a:tcPr anchor="ctr">
                     <a:solidFill>
                       <a:srgbClr val="FFFFFF"/>
                     </a:solidFill>
                   </a:tcPr>
                 </a:tc>
               </a:tr>
-              <a:tr h="427939">
+              <a:tr h="338328">
                 <a:tc>
                   <a:txBody>
                     <a:bodyPr wrap="square" lIns="18288" rIns="18288" tIns="36576" bIns="36576"/>
@@ -18412,7 +18489,7 @@
                       </a:r>
                     </a:p>
                   </a:txBody>
-                  <a:tcPr>
+                  <a:tcPr anchor="ctr">
                     <a:solidFill>
                       <a:srgbClr val="F1F5F9"/>
                     </a:solidFill>
@@ -18436,7 +18513,7 @@
                       </a:r>
                     </a:p>
                   </a:txBody>
-                  <a:tcPr>
+                  <a:tcPr anchor="ctr">
                     <a:solidFill>
                       <a:srgbClr val="F1F5F9"/>
                     </a:solidFill>
@@ -18460,7 +18537,7 @@
                       </a:r>
                     </a:p>
                   </a:txBody>
-                  <a:tcPr>
+                  <a:tcPr anchor="ctr">
                     <a:solidFill>
                       <a:srgbClr val="F1F5F9"/>
                     </a:solidFill>
@@ -18484,7 +18561,7 @@
                       </a:r>
                     </a:p>
                   </a:txBody>
-                  <a:tcPr>
+                  <a:tcPr anchor="ctr">
                     <a:solidFill>
                       <a:srgbClr val="F1F5F9"/>
                     </a:solidFill>
@@ -18508,7 +18585,7 @@
                       </a:r>
                     </a:p>
                   </a:txBody>
-                  <a:tcPr>
+                  <a:tcPr anchor="ctr">
                     <a:solidFill>
                       <a:srgbClr val="F1F5F9"/>
                     </a:solidFill>
@@ -18532,7 +18609,7 @@
                       </a:r>
                     </a:p>
                   </a:txBody>
-                  <a:tcPr>
+                  <a:tcPr anchor="ctr">
                     <a:solidFill>
                       <a:srgbClr val="F1F5F9"/>
                     </a:solidFill>
@@ -18556,14 +18633,14 @@
                       </a:r>
                     </a:p>
                   </a:txBody>
-                  <a:tcPr>
+                  <a:tcPr anchor="ctr">
                     <a:solidFill>
                       <a:srgbClr val="F1F5F9"/>
                     </a:solidFill>
                   </a:tcPr>
                 </a:tc>
               </a:tr>
-              <a:tr h="427939">
+              <a:tr h="338328">
                 <a:tc>
                   <a:txBody>
                     <a:bodyPr wrap="square" lIns="18288" rIns="18288" tIns="36576" bIns="36576"/>
@@ -18582,7 +18659,7 @@
                       </a:r>
                     </a:p>
                   </a:txBody>
-                  <a:tcPr>
+                  <a:tcPr anchor="ctr">
                     <a:solidFill>
                       <a:srgbClr val="FFFFFF"/>
                     </a:solidFill>
@@ -18606,7 +18683,7 @@
                       </a:r>
                     </a:p>
                   </a:txBody>
-                  <a:tcPr>
+                  <a:tcPr anchor="ctr">
                     <a:solidFill>
                       <a:srgbClr val="FFFFFF"/>
                     </a:solidFill>
@@ -18630,7 +18707,7 @@
                       </a:r>
                     </a:p>
                   </a:txBody>
-                  <a:tcPr>
+                  <a:tcPr anchor="ctr">
                     <a:solidFill>
                       <a:srgbClr val="FFFFFF"/>
                     </a:solidFill>
@@ -18654,7 +18731,7 @@
                       </a:r>
                     </a:p>
                   </a:txBody>
-                  <a:tcPr>
+                  <a:tcPr anchor="ctr">
                     <a:solidFill>
                       <a:srgbClr val="FFFFFF"/>
                     </a:solidFill>
@@ -18678,7 +18755,7 @@
                       </a:r>
                     </a:p>
                   </a:txBody>
-                  <a:tcPr>
+                  <a:tcPr anchor="ctr">
                     <a:solidFill>
                       <a:srgbClr val="FFFFFF"/>
                     </a:solidFill>
@@ -18702,7 +18779,7 @@
                       </a:r>
                     </a:p>
                   </a:txBody>
-                  <a:tcPr>
+                  <a:tcPr anchor="ctr">
                     <a:solidFill>
                       <a:srgbClr val="FFFFFF"/>
                     </a:solidFill>
@@ -18726,14 +18803,14 @@
                       </a:r>
                     </a:p>
                   </a:txBody>
-                  <a:tcPr>
+                  <a:tcPr anchor="ctr">
                     <a:solidFill>
                       <a:srgbClr val="FFFFFF"/>
                     </a:solidFill>
                   </a:tcPr>
                 </a:tc>
               </a:tr>
-              <a:tr h="427940">
+              <a:tr h="338328">
                 <a:tc>
                   <a:txBody>
                     <a:bodyPr wrap="square" lIns="18288" rIns="18288" tIns="36576" bIns="36576"/>
@@ -18752,7 +18829,7 @@
                       </a:r>
                     </a:p>
                   </a:txBody>
-                  <a:tcPr>
+                  <a:tcPr anchor="ctr">
                     <a:solidFill>
                       <a:srgbClr val="F1F5F9"/>
                     </a:solidFill>
@@ -18776,7 +18853,7 @@
                       </a:r>
                     </a:p>
                   </a:txBody>
-                  <a:tcPr>
+                  <a:tcPr anchor="ctr">
                     <a:solidFill>
                       <a:srgbClr val="F1F5F9"/>
                     </a:solidFill>
@@ -18800,7 +18877,7 @@
                       </a:r>
                     </a:p>
                   </a:txBody>
-                  <a:tcPr>
+                  <a:tcPr anchor="ctr">
                     <a:solidFill>
                       <a:srgbClr val="F1F5F9"/>
                     </a:solidFill>
@@ -18824,7 +18901,7 @@
                       </a:r>
                     </a:p>
                   </a:txBody>
-                  <a:tcPr>
+                  <a:tcPr anchor="ctr">
                     <a:solidFill>
                       <a:srgbClr val="F1F5F9"/>
                     </a:solidFill>
@@ -18848,7 +18925,7 @@
                       </a:r>
                     </a:p>
                   </a:txBody>
-                  <a:tcPr>
+                  <a:tcPr anchor="ctr">
                     <a:solidFill>
                       <a:srgbClr val="F1F5F9"/>
                     </a:solidFill>
@@ -18872,7 +18949,7 @@
                       </a:r>
                     </a:p>
                   </a:txBody>
-                  <a:tcPr>
+                  <a:tcPr anchor="ctr">
                     <a:solidFill>
                       <a:srgbClr val="F1F5F9"/>
                     </a:solidFill>
@@ -18896,7 +18973,7 @@
                       </a:r>
                     </a:p>
                   </a:txBody>
-                  <a:tcPr>
+                  <a:tcPr anchor="ctr">
                     <a:solidFill>
                       <a:srgbClr val="F1F5F9"/>
                     </a:solidFill>
@@ -19047,7 +19124,7 @@
                       </a:r>
                     </a:p>
                   </a:txBody>
-                  <a:tcPr>
+                  <a:tcPr anchor="ctr">
                     <a:solidFill>
                       <a:srgbClr val="1E3A8A"/>
                     </a:solidFill>
@@ -19071,7 +19148,7 @@
                       </a:r>
                     </a:p>
                   </a:txBody>
-                  <a:tcPr>
+                  <a:tcPr anchor="ctr">
                     <a:solidFill>
                       <a:srgbClr val="1E3A8A"/>
                     </a:solidFill>
@@ -19095,7 +19172,7 @@
                       </a:r>
                     </a:p>
                   </a:txBody>
-                  <a:tcPr>
+                  <a:tcPr anchor="ctr">
                     <a:solidFill>
                       <a:srgbClr val="1E3A8A"/>
                     </a:solidFill>
@@ -19119,7 +19196,7 @@
                       </a:r>
                     </a:p>
                   </a:txBody>
-                  <a:tcPr>
+                  <a:tcPr anchor="ctr">
                     <a:solidFill>
                       <a:srgbClr val="1E3A8A"/>
                     </a:solidFill>
@@ -19148,7 +19225,7 @@
                       </a:r>
                     </a:p>
                   </a:txBody>
-                  <a:tcPr>
+                  <a:tcPr anchor="ctr">
                     <a:solidFill>
                       <a:srgbClr val="FFFFFF"/>
                     </a:solidFill>
@@ -19175,7 +19252,7 @@
                       </a:r>
                     </a:p>
                   </a:txBody>
-                  <a:tcPr>
+                  <a:tcPr anchor="ctr">
                     <a:solidFill>
                       <a:srgbClr val="FFFFFF"/>
                     </a:solidFill>
@@ -19202,7 +19279,7 @@
                       </a:r>
                     </a:p>
                   </a:txBody>
-                  <a:tcPr>
+                  <a:tcPr anchor="ctr">
                     <a:solidFill>
                       <a:srgbClr val="FFFFFF"/>
                     </a:solidFill>
@@ -19233,7 +19310,7 @@
                       </a:r>
                     </a:p>
                   </a:txBody>
-                  <a:tcPr>
+                  <a:tcPr anchor="ctr">
                     <a:solidFill>
                       <a:srgbClr val="FFFFFF"/>
                     </a:solidFill>
@@ -19262,7 +19339,7 @@
                       </a:r>
                     </a:p>
                   </a:txBody>
-                  <a:tcPr>
+                  <a:tcPr anchor="ctr">
                     <a:solidFill>
                       <a:srgbClr val="FFFFFF"/>
                     </a:solidFill>
@@ -19289,7 +19366,7 @@
                       </a:r>
                     </a:p>
                   </a:txBody>
-                  <a:tcPr>
+                  <a:tcPr anchor="ctr">
                     <a:solidFill>
                       <a:srgbClr val="FFFFFF"/>
                     </a:solidFill>
@@ -19316,7 +19393,7 @@
                       </a:r>
                     </a:p>
                   </a:txBody>
-                  <a:tcPr>
+                  <a:tcPr anchor="ctr">
                     <a:solidFill>
                       <a:srgbClr val="FFFFFF"/>
                     </a:solidFill>
@@ -19347,7 +19424,7 @@
                       </a:r>
                     </a:p>
                   </a:txBody>
-                  <a:tcPr>
+                  <a:tcPr anchor="ctr">
                     <a:solidFill>
                       <a:srgbClr val="FFFFFF"/>
                     </a:solidFill>
@@ -19376,7 +19453,7 @@
                       </a:r>
                     </a:p>
                   </a:txBody>
-                  <a:tcPr>
+                  <a:tcPr anchor="ctr">
                     <a:solidFill>
                       <a:srgbClr val="FFFFFF"/>
                     </a:solidFill>
@@ -19403,7 +19480,7 @@
                       </a:r>
                     </a:p>
                   </a:txBody>
-                  <a:tcPr>
+                  <a:tcPr anchor="ctr">
                     <a:solidFill>
                       <a:srgbClr val="FFFFFF"/>
                     </a:solidFill>
@@ -19430,7 +19507,7 @@
                       </a:r>
                     </a:p>
                   </a:txBody>
-                  <a:tcPr>
+                  <a:tcPr anchor="ctr">
                     <a:solidFill>
                       <a:srgbClr val="FFFFFF"/>
                     </a:solidFill>
@@ -19461,7 +19538,7 @@
                       </a:r>
                     </a:p>
                   </a:txBody>
-                  <a:tcPr>
+                  <a:tcPr anchor="ctr">
                     <a:solidFill>
                       <a:srgbClr val="FFFFFF"/>
                     </a:solidFill>
@@ -19583,11 +19660,11 @@
               </a:defRPr>
             </a:pPr>
             <a:r>
-              <a:t>• 开源组合门槛: 1.6 / (60 - 10) = 3.2% (1K 需 32 tokens)</a:t>
+              <a:t>• 原生 Mooncake 门槛: 1.6 / (60 - 10) = 3.2% (1K 需 32 tokens)</a:t>
             </a:r>
             <a:br/>
             <a:r>
-              <a:t>• 本项目门槛:   0.575 / (60 - 4.5) = 1.0% (1K 仅需 10 tokens 即正收益)</a:t>
+              <a:t>• 本项目方案门槛:   0.575 / (60 - 4.5) = 1.0% (1K 仅需 10 tokens 即正收益)</a:t>
             </a:r>
             <a:br/>
             <a:r>

--- a/kvcache/unified_kv_memory/统一异构KVCache存储池_第一方推理基础设施立项汇报_10页精美图表增强版_20260814.pptx
+++ b/kvcache/unified_kv_memory/统一异构KVCache存储池_第一方推理基础设施立项汇报_10页精美图表增强版_20260814.pptx
@@ -6613,7 +6613,7 @@
               </a:defRPr>
             </a:pPr>
             <a:r>
-              <a:t>规划 4～5 周敏捷验证，包含 8 项核心验证 (PVT) 与 3 项可行性证伪 (CVT)，按四个核心验证阶段 (E0～E3) 门禁逐级推进</a:t>
+              <a:t>规划 4～5 周敏捷验证，包含 10 项必做验证 (PVT) 与 1 项可行性证伪 (CVT)，按四个核心验证阶段 (E0～E3) 门禁逐级推进</a:t>
             </a:r>
           </a:p>
         </p:txBody>
@@ -7124,7 +7124,7 @@
               </a:defRPr>
             </a:pPr>
             <a:r>
-              <a:t>▶ E0/E1 阶段目标：</a:t>
+              <a:t>▶ DPU 双轨协同 (PVT-09)：</a:t>
             </a:r>
             <a:r>
               <a:rPr sz="1100" b="0">
@@ -7133,7 +7133,7 @@
                 </a:solidFill>
                 <a:latin typeface="Microsoft YaHei"/>
               </a:rPr>
-              <a:t>确认业务复用收益空间，打通通信观测闭环。</a:t>
+              <a:t>DPU 卸载加速与 &lt;500µs 无缝降级。</a:t>
             </a:r>
           </a:p>
         </p:txBody>
@@ -7264,7 +7264,7 @@
               </a:defRPr>
             </a:pPr>
             <a:r>
-              <a:t>▶ 共享总线快路径 (PVT-03)：</a:t>
+              <a:t>▶ 远端直读边界 (PVT-03)：</a:t>
             </a:r>
             <a:r>
               <a:rPr sz="1100" b="0">
@@ -7273,7 +7273,7 @@
                 </a:solidFill>
                 <a:latin typeface="Microsoft YaHei"/>
               </a:rPr>
-              <a:t>验证 UBMEM 快路径，保持微秒级响应。</a:t>
+              <a:t>测定重读边界，ViewGuard 容错回滚。</a:t>
             </a:r>
           </a:p>
           <a:p>
@@ -7301,7 +7301,7 @@
                 </a:solidFill>
                 <a:latin typeface="Microsoft YaHei"/>
               </a:rPr>
-              <a:t>验证微秒级选路决策，决策准确率 &gt; 95%。</a:t>
+              <a:t>验证微秒级选路决策，决策准确率 &gt; 90%。</a:t>
             </a:r>
           </a:p>
         </p:txBody>
@@ -7385,7 +7385,7 @@
               </a:defRPr>
             </a:pPr>
             <a:r>
-              <a:t>分层容量与消费资格 (E2 阶段)</a:t>
+              <a:t>分层容量与消费资格 (E1 / E2 阶段)</a:t>
             </a:r>
           </a:p>
           <a:p>
@@ -7460,7 +7460,7 @@
               </a:defRPr>
             </a:pPr>
             <a:r>
-              <a:t>▶ E2 阶段目标：</a:t>
+              <a:t>▶ 组播分发验证 (PVT-08)：</a:t>
             </a:r>
             <a:r>
               <a:rPr sz="1100" b="0">
@@ -7469,7 +7469,7 @@
                 </a:solidFill>
                 <a:latin typeface="Microsoft YaHei"/>
               </a:rPr>
-              <a:t>分层扩容收益成立，多租户隔离达标。</a:t>
+              <a:t>1-to-N 软件中继组播，源端带宽降 ≥60%。</a:t>
             </a:r>
           </a:p>
         </p:txBody>
@@ -7600,7 +7600,7 @@
               </a:defRPr>
             </a:pPr>
             <a:r>
-              <a:t>▶ 3 项架构证伪 (CVT)：</a:t>
+              <a:t>▶ 软件 RCU 证伪 (CVT-01)：</a:t>
             </a:r>
             <a:r>
               <a:rPr sz="1100" b="0">
@@ -7609,7 +7609,7 @@
                 </a:solidFill>
                 <a:latin typeface="Microsoft YaHei"/>
               </a:rPr>
-              <a:t>多播/迁移/DPU 卸载证伪确立主路径。</a:t>
+              <a:t>验证软件 RCU 显存整理，证伪专用芯片。</a:t>
             </a:r>
           </a:p>
           <a:p>
